--- a/11_MaxPID/11_MaxPID_Corrige.pptx
+++ b/11_MaxPID/11_MaxPID_Corrige.pptx
@@ -385,7 +385,7 @@
           <a:p>
             <a:fld id="{D7F135F6-2A09-4FDD-9ECA-096E230CA0FA}" type="datetimeFigureOut">
               <a:rPr lang="fr-FR" smtClean="0"/>
-              <a:t>18/02/2026</a:t>
+              <a:t>24/02/2026</a:t>
             </a:fld>
             <a:endParaRPr lang="fr-FR"/>
           </a:p>
@@ -590,7 +590,7 @@
           <a:p>
             <a:fld id="{D7F135F6-2A09-4FDD-9ECA-096E230CA0FA}" type="datetimeFigureOut">
               <a:rPr lang="fr-FR" smtClean="0"/>
-              <a:t>18/02/2026</a:t>
+              <a:t>24/02/2026</a:t>
             </a:fld>
             <a:endParaRPr lang="fr-FR"/>
           </a:p>
@@ -846,7 +846,7 @@
           <a:p>
             <a:fld id="{D7F135F6-2A09-4FDD-9ECA-096E230CA0FA}" type="datetimeFigureOut">
               <a:rPr lang="fr-FR" smtClean="0"/>
-              <a:t>18/02/2026</a:t>
+              <a:t>24/02/2026</a:t>
             </a:fld>
             <a:endParaRPr lang="fr-FR"/>
           </a:p>
@@ -1052,7 +1052,7 @@
           <a:p>
             <a:fld id="{D7F135F6-2A09-4FDD-9ECA-096E230CA0FA}" type="datetimeFigureOut">
               <a:rPr lang="fr-FR" smtClean="0"/>
-              <a:t>18/02/2026</a:t>
+              <a:t>24/02/2026</a:t>
             </a:fld>
             <a:endParaRPr lang="fr-FR"/>
           </a:p>
@@ -1428,7 +1428,7 @@
           <a:p>
             <a:fld id="{D7F135F6-2A09-4FDD-9ECA-096E230CA0FA}" type="datetimeFigureOut">
               <a:rPr lang="fr-FR" smtClean="0"/>
-              <a:t>18/02/2026</a:t>
+              <a:t>24/02/2026</a:t>
             </a:fld>
             <a:endParaRPr lang="fr-FR"/>
           </a:p>
@@ -1703,7 +1703,7 @@
           <a:p>
             <a:fld id="{D7F135F6-2A09-4FDD-9ECA-096E230CA0FA}" type="datetimeFigureOut">
               <a:rPr lang="fr-FR" smtClean="0"/>
-              <a:t>18/02/2026</a:t>
+              <a:t>24/02/2026</a:t>
             </a:fld>
             <a:endParaRPr lang="fr-FR"/>
           </a:p>
@@ -2082,7 +2082,7 @@
           <a:p>
             <a:fld id="{D7F135F6-2A09-4FDD-9ECA-096E230CA0FA}" type="datetimeFigureOut">
               <a:rPr lang="fr-FR" smtClean="0"/>
-              <a:t>18/02/2026</a:t>
+              <a:t>24/02/2026</a:t>
             </a:fld>
             <a:endParaRPr lang="fr-FR"/>
           </a:p>
@@ -2200,7 +2200,7 @@
           <a:p>
             <a:fld id="{D7F135F6-2A09-4FDD-9ECA-096E230CA0FA}" type="datetimeFigureOut">
               <a:rPr lang="fr-FR" smtClean="0"/>
-              <a:t>18/02/2026</a:t>
+              <a:t>24/02/2026</a:t>
             </a:fld>
             <a:endParaRPr lang="fr-FR"/>
           </a:p>
@@ -2374,7 +2374,7 @@
           <a:p>
             <a:fld id="{D7F135F6-2A09-4FDD-9ECA-096E230CA0FA}" type="datetimeFigureOut">
               <a:rPr lang="fr-FR" smtClean="0"/>
-              <a:t>18/02/2026</a:t>
+              <a:t>24/02/2026</a:t>
             </a:fld>
             <a:endParaRPr lang="fr-FR"/>
           </a:p>
@@ -2731,7 +2731,7 @@
           <a:p>
             <a:fld id="{D7F135F6-2A09-4FDD-9ECA-096E230CA0FA}" type="datetimeFigureOut">
               <a:rPr lang="fr-FR" smtClean="0"/>
-              <a:t>18/02/2026</a:t>
+              <a:t>24/02/2026</a:t>
             </a:fld>
             <a:endParaRPr lang="fr-FR"/>
           </a:p>
@@ -3116,7 +3116,7 @@
           <a:p>
             <a:fld id="{D7F135F6-2A09-4FDD-9ECA-096E230CA0FA}" type="datetimeFigureOut">
               <a:rPr lang="fr-FR" smtClean="0"/>
-              <a:t>18/02/2026</a:t>
+              <a:t>24/02/2026</a:t>
             </a:fld>
             <a:endParaRPr lang="fr-FR"/>
           </a:p>
@@ -3420,7 +3420,7 @@
           <a:p>
             <a:fld id="{D7F135F6-2A09-4FDD-9ECA-096E230CA0FA}" type="datetimeFigureOut">
               <a:rPr lang="fr-FR" smtClean="0"/>
-              <a:t>18/02/2026</a:t>
+              <a:t>24/02/2026</a:t>
             </a:fld>
             <a:endParaRPr lang="fr-FR" dirty="0"/>
           </a:p>
@@ -37685,8 +37685,8 @@
           <a:chExt cx="0" cy="0"/>
         </a:xfrm>
       </p:grpSpPr>
-      <mc:AlternateContent xmlns:mc="http://schemas.openxmlformats.org/markup-compatibility/2006">
-        <mc:Choice xmlns:a14="http://schemas.microsoft.com/office/drawing/2010/main" Requires="a14">
+      <mc:AlternateContent xmlns:mc="http://schemas.openxmlformats.org/markup-compatibility/2006" xmlns:a14="http://schemas.microsoft.com/office/drawing/2010/main">
+        <mc:Choice Requires="a14">
           <p:sp>
             <p:nvSpPr>
               <p:cNvPr id="2" name="Titre 1">
@@ -37757,7 +37757,7 @@
             </p:txBody>
           </p:sp>
         </mc:Choice>
-        <mc:Fallback>
+        <mc:Fallback xmlns="">
           <p:sp>
             <p:nvSpPr>
               <p:cNvPr id="2" name="Titre 1">
@@ -37817,7 +37817,7 @@
             </p:nvSpPr>
             <p:spPr>
               <a:xfrm>
-                <a:off x="117795" y="981887"/>
+                <a:off x="117795" y="956486"/>
                 <a:ext cx="9197655" cy="5253339"/>
               </a:xfrm>
             </p:spPr>
@@ -39032,13 +39032,7 @@
                               <a:rPr lang="fr-FR" i="1">
                                 <a:latin typeface="Cambria Math" panose="02040503050406030204" pitchFamily="18" charset="0"/>
                               </a:rPr>
-                              <m:t>=</m:t>
-                            </m:r>
-                            <m:r>
-                              <a:rPr lang="fr-FR" i="1">
-                                <a:latin typeface="Cambria Math" panose="02040503050406030204" pitchFamily="18" charset="0"/>
-                              </a:rPr>
-                              <m:t>0</m:t>
+                              <m:t>=0</m:t>
                             </m:r>
                           </m:e>
                           <m:e>
@@ -39144,13 +39138,7 @@
                               <a:rPr lang="fr-FR" i="1">
                                 <a:latin typeface="Cambria Math" panose="02040503050406030204" pitchFamily="18" charset="0"/>
                               </a:rPr>
-                              <m:t>=</m:t>
-                            </m:r>
-                            <m:r>
-                              <a:rPr lang="fr-FR" i="1">
-                                <a:latin typeface="Cambria Math" panose="02040503050406030204" pitchFamily="18" charset="0"/>
-                              </a:rPr>
-                              <m:t>0</m:t>
+                              <m:t>=0</m:t>
                             </m:r>
                           </m:e>
                         </m:eqArr>
@@ -40101,6 +40089,95 @@
                 <a:endParaRPr lang="fr-FR" dirty="0"/>
               </a:p>
               <a:p>
+                <a:pPr lvl="2"/>
+                <a14:m>
+                  <m:oMath xmlns:m="http://schemas.openxmlformats.org/officeDocument/2006/math">
+                    <m:sSup>
+                      <m:sSupPr>
+                        <m:ctrlPr>
+                          <a:rPr lang="fr-FR" b="0" i="1" smtClean="0"/>
+                        </m:ctrlPr>
+                      </m:sSupPr>
+                      <m:e>
+                        <m:r>
+                          <a:rPr lang="fr-FR" b="0" i="1" smtClean="0"/>
+                          <m:t>𝜃</m:t>
+                        </m:r>
+                      </m:e>
+                      <m:sup>
+                        <m:r>
+                          <a:rPr lang="fr-FR" b="0" i="1" smtClean="0"/>
+                          <m:t>′</m:t>
+                        </m:r>
+                      </m:sup>
+                    </m:sSup>
+                  </m:oMath>
+                </a14:m>
+                <a:r>
+                  <a:rPr lang="fr-FR" b="0" i="1" dirty="0"/>
+                  <a:t> varie de </a:t>
+                </a:r>
+                <a14:m>
+                  <m:oMath xmlns:m="http://schemas.openxmlformats.org/officeDocument/2006/math">
+                    <m:r>
+                      <a:rPr lang="fr-FR" b="0" i="1" smtClean="0">
+                        <a:latin typeface="Cambria Math" panose="02040503050406030204" pitchFamily="18" charset="0"/>
+                      </a:rPr>
+                      <m:t>𝛼</m:t>
+                    </m:r>
+                  </m:oMath>
+                </a14:m>
+                <a:r>
+                  <a:rPr lang="fr-FR" b="0" i="1" dirty="0"/>
+                  <a:t> à </a:t>
+                </a:r>
+                <a14:m>
+                  <m:oMath xmlns:m="http://schemas.openxmlformats.org/officeDocument/2006/math">
+                    <m:r>
+                      <a:rPr lang="fr-FR" i="1">
+                        <a:latin typeface="Cambria Math" panose="02040503050406030204" pitchFamily="18" charset="0"/>
+                      </a:rPr>
+                      <m:t>𝛼</m:t>
+                    </m:r>
+                    <m:r>
+                      <a:rPr lang="fr-FR" b="0" i="1" smtClean="0">
+                        <a:latin typeface="Cambria Math" panose="02040503050406030204" pitchFamily="18" charset="0"/>
+                      </a:rPr>
+                      <m:t>+</m:t>
+                    </m:r>
+                    <m:f>
+                      <m:fPr>
+                        <m:ctrlPr>
+                          <a:rPr lang="fr-FR" b="0" i="1" smtClean="0">
+                            <a:latin typeface="Cambria Math" panose="02040503050406030204" pitchFamily="18" charset="0"/>
+                          </a:rPr>
+                        </m:ctrlPr>
+                      </m:fPr>
+                      <m:num>
+                        <m:r>
+                          <a:rPr lang="fr-FR" b="0" i="1" smtClean="0">
+                            <a:latin typeface="Cambria Math" panose="02040503050406030204" pitchFamily="18" charset="0"/>
+                          </a:rPr>
+                          <m:t>𝜋</m:t>
+                        </m:r>
+                      </m:num>
+                      <m:den>
+                        <m:r>
+                          <a:rPr lang="fr-FR" b="0" i="1" smtClean="0">
+                            <a:latin typeface="Cambria Math" panose="02040503050406030204" pitchFamily="18" charset="0"/>
+                          </a:rPr>
+                          <m:t>2</m:t>
+                        </m:r>
+                      </m:den>
+                    </m:f>
+                  </m:oMath>
+                </a14:m>
+                <a:r>
+                  <a:rPr lang="fr-FR" b="0" i="1" dirty="0"/>
+                  <a:t>.</a:t>
+                </a:r>
+              </a:p>
+              <a:p>
                 <a:pPr lvl="1"/>
                 <a:endParaRPr lang="fr-FR" b="0" i="1" dirty="0">
                   <a:latin typeface="Cambria Math" panose="02040503050406030204" pitchFamily="18" charset="0"/>
@@ -40362,7 +40439,7 @@
             </p:nvSpPr>
             <p:spPr>
               <a:xfrm>
-                <a:off x="117795" y="981887"/>
+                <a:off x="117795" y="956486"/>
                 <a:ext cx="9197655" cy="5253339"/>
               </a:xfrm>
               <a:blipFill>
@@ -40483,8 +40560,8 @@
           <a:chExt cx="0" cy="0"/>
         </a:xfrm>
       </p:grpSpPr>
-      <mc:AlternateContent xmlns:mc="http://schemas.openxmlformats.org/markup-compatibility/2006">
-        <mc:Choice xmlns:a14="http://schemas.microsoft.com/office/drawing/2010/main" Requires="a14">
+      <mc:AlternateContent xmlns:mc="http://schemas.openxmlformats.org/markup-compatibility/2006" xmlns:a14="http://schemas.microsoft.com/office/drawing/2010/main">
+        <mc:Choice Requires="a14">
           <p:sp>
             <p:nvSpPr>
               <p:cNvPr id="2" name="Titre 1">
@@ -40555,7 +40632,7 @@
             </p:txBody>
           </p:sp>
         </mc:Choice>
-        <mc:Fallback>
+        <mc:Fallback xmlns="">
           <p:sp>
             <p:nvSpPr>
               <p:cNvPr id="2" name="Titre 1">
@@ -40595,8 +40672,8 @@
           </p:sp>
         </mc:Fallback>
       </mc:AlternateContent>
-      <mc:AlternateContent xmlns:mc="http://schemas.openxmlformats.org/markup-compatibility/2006">
-        <mc:Choice xmlns:a14="http://schemas.microsoft.com/office/drawing/2010/main" Requires="a14">
+      <mc:AlternateContent xmlns:mc="http://schemas.openxmlformats.org/markup-compatibility/2006" xmlns:a14="http://schemas.microsoft.com/office/drawing/2010/main">
+        <mc:Choice Requires="a14">
           <p:sp>
             <p:nvSpPr>
               <p:cNvPr id="3" name="Espace réservé du contenu 2">
@@ -41698,13 +41775,7 @@
                               <a:rPr lang="fr-FR" i="1">
                                 <a:latin typeface="Cambria Math" panose="02040503050406030204" pitchFamily="18" charset="0"/>
                               </a:rPr>
-                              <m:t>=</m:t>
-                            </m:r>
-                            <m:r>
-                              <a:rPr lang="fr-FR" i="1">
-                                <a:latin typeface="Cambria Math" panose="02040503050406030204" pitchFamily="18" charset="0"/>
-                              </a:rPr>
-                              <m:t>0</m:t>
+                              <m:t>=0</m:t>
                             </m:r>
                           </m:e>
                           <m:e>
@@ -41810,13 +41881,7 @@
                               <a:rPr lang="fr-FR" i="1">
                                 <a:latin typeface="Cambria Math" panose="02040503050406030204" pitchFamily="18" charset="0"/>
                               </a:rPr>
-                              <m:t>=</m:t>
-                            </m:r>
-                            <m:r>
-                              <a:rPr lang="fr-FR" i="1">
-                                <a:latin typeface="Cambria Math" panose="02040503050406030204" pitchFamily="18" charset="0"/>
-                              </a:rPr>
-                              <m:t>0</m:t>
+                              <m:t>=0</m:t>
                             </m:r>
                           </m:e>
                         </m:eqArr>
@@ -43414,7 +43479,7 @@
             </p:txBody>
           </p:sp>
         </mc:Choice>
-        <mc:Fallback>
+        <mc:Fallback xmlns="">
           <p:sp>
             <p:nvSpPr>
               <p:cNvPr id="3" name="Espace réservé du contenu 2">

--- a/11_MaxPID/11_MaxPID_Corrige.pptx
+++ b/11_MaxPID/11_MaxPID_Corrige.pptx
@@ -385,7 +385,7 @@
           <a:p>
             <a:fld id="{D7F135F6-2A09-4FDD-9ECA-096E230CA0FA}" type="datetimeFigureOut">
               <a:rPr lang="fr-FR" smtClean="0"/>
-              <a:t>24/02/2026</a:t>
+              <a:t>27/02/2026</a:t>
             </a:fld>
             <a:endParaRPr lang="fr-FR"/>
           </a:p>
@@ -590,7 +590,7 @@
           <a:p>
             <a:fld id="{D7F135F6-2A09-4FDD-9ECA-096E230CA0FA}" type="datetimeFigureOut">
               <a:rPr lang="fr-FR" smtClean="0"/>
-              <a:t>24/02/2026</a:t>
+              <a:t>27/02/2026</a:t>
             </a:fld>
             <a:endParaRPr lang="fr-FR"/>
           </a:p>
@@ -846,7 +846,7 @@
           <a:p>
             <a:fld id="{D7F135F6-2A09-4FDD-9ECA-096E230CA0FA}" type="datetimeFigureOut">
               <a:rPr lang="fr-FR" smtClean="0"/>
-              <a:t>24/02/2026</a:t>
+              <a:t>27/02/2026</a:t>
             </a:fld>
             <a:endParaRPr lang="fr-FR"/>
           </a:p>
@@ -1052,7 +1052,7 @@
           <a:p>
             <a:fld id="{D7F135F6-2A09-4FDD-9ECA-096E230CA0FA}" type="datetimeFigureOut">
               <a:rPr lang="fr-FR" smtClean="0"/>
-              <a:t>24/02/2026</a:t>
+              <a:t>27/02/2026</a:t>
             </a:fld>
             <a:endParaRPr lang="fr-FR"/>
           </a:p>
@@ -1428,7 +1428,7 @@
           <a:p>
             <a:fld id="{D7F135F6-2A09-4FDD-9ECA-096E230CA0FA}" type="datetimeFigureOut">
               <a:rPr lang="fr-FR" smtClean="0"/>
-              <a:t>24/02/2026</a:t>
+              <a:t>27/02/2026</a:t>
             </a:fld>
             <a:endParaRPr lang="fr-FR"/>
           </a:p>
@@ -1703,7 +1703,7 @@
           <a:p>
             <a:fld id="{D7F135F6-2A09-4FDD-9ECA-096E230CA0FA}" type="datetimeFigureOut">
               <a:rPr lang="fr-FR" smtClean="0"/>
-              <a:t>24/02/2026</a:t>
+              <a:t>27/02/2026</a:t>
             </a:fld>
             <a:endParaRPr lang="fr-FR"/>
           </a:p>
@@ -2082,7 +2082,7 @@
           <a:p>
             <a:fld id="{D7F135F6-2A09-4FDD-9ECA-096E230CA0FA}" type="datetimeFigureOut">
               <a:rPr lang="fr-FR" smtClean="0"/>
-              <a:t>24/02/2026</a:t>
+              <a:t>27/02/2026</a:t>
             </a:fld>
             <a:endParaRPr lang="fr-FR"/>
           </a:p>
@@ -2200,7 +2200,7 @@
           <a:p>
             <a:fld id="{D7F135F6-2A09-4FDD-9ECA-096E230CA0FA}" type="datetimeFigureOut">
               <a:rPr lang="fr-FR" smtClean="0"/>
-              <a:t>24/02/2026</a:t>
+              <a:t>27/02/2026</a:t>
             </a:fld>
             <a:endParaRPr lang="fr-FR"/>
           </a:p>
@@ -2374,7 +2374,7 @@
           <a:p>
             <a:fld id="{D7F135F6-2A09-4FDD-9ECA-096E230CA0FA}" type="datetimeFigureOut">
               <a:rPr lang="fr-FR" smtClean="0"/>
-              <a:t>24/02/2026</a:t>
+              <a:t>27/02/2026</a:t>
             </a:fld>
             <a:endParaRPr lang="fr-FR"/>
           </a:p>
@@ -2731,7 +2731,7 @@
           <a:p>
             <a:fld id="{D7F135F6-2A09-4FDD-9ECA-096E230CA0FA}" type="datetimeFigureOut">
               <a:rPr lang="fr-FR" smtClean="0"/>
-              <a:t>24/02/2026</a:t>
+              <a:t>27/02/2026</a:t>
             </a:fld>
             <a:endParaRPr lang="fr-FR"/>
           </a:p>
@@ -3116,7 +3116,7 @@
           <a:p>
             <a:fld id="{D7F135F6-2A09-4FDD-9ECA-096E230CA0FA}" type="datetimeFigureOut">
               <a:rPr lang="fr-FR" smtClean="0"/>
-              <a:t>24/02/2026</a:t>
+              <a:t>27/02/2026</a:t>
             </a:fld>
             <a:endParaRPr lang="fr-FR"/>
           </a:p>
@@ -3420,7 +3420,7 @@
           <a:p>
             <a:fld id="{D7F135F6-2A09-4FDD-9ECA-096E230CA0FA}" type="datetimeFigureOut">
               <a:rPr lang="fr-FR" smtClean="0"/>
-              <a:t>24/02/2026</a:t>
+              <a:t>27/02/2026</a:t>
             </a:fld>
             <a:endParaRPr lang="fr-FR" dirty="0"/>
           </a:p>
@@ -37823,7 +37823,7 @@
             </p:spPr>
             <p:txBody>
               <a:bodyPr>
-                <a:normAutofit fontScale="70000" lnSpcReduction="20000"/>
+                <a:normAutofit fontScale="55000" lnSpcReduction="20000"/>
               </a:bodyPr>
               <a:lstStyle/>
               <a:p>
@@ -40095,18 +40095,24 @@
                     <m:sSup>
                       <m:sSupPr>
                         <m:ctrlPr>
-                          <a:rPr lang="fr-FR" b="0" i="1" smtClean="0"/>
+                          <a:rPr lang="fr-FR" b="0" i="1" smtClean="0">
+                            <a:latin typeface="Cambria Math" panose="02040503050406030204" pitchFamily="18" charset="0"/>
+                          </a:rPr>
                         </m:ctrlPr>
                       </m:sSupPr>
                       <m:e>
                         <m:r>
-                          <a:rPr lang="fr-FR" b="0" i="1" smtClean="0"/>
+                          <a:rPr lang="fr-FR" b="0" i="1" smtClean="0">
+                            <a:latin typeface="Cambria Math" panose="02040503050406030204" pitchFamily="18" charset="0"/>
+                          </a:rPr>
                           <m:t>𝜃</m:t>
                         </m:r>
                       </m:e>
                       <m:sup>
                         <m:r>
-                          <a:rPr lang="fr-FR" b="0" i="1" smtClean="0"/>
+                          <a:rPr lang="fr-FR" b="0" i="1" smtClean="0">
+                            <a:latin typeface="Cambria Math" panose="02040503050406030204" pitchFamily="18" charset="0"/>
+                          </a:rPr>
                           <m:t>′</m:t>
                         </m:r>
                       </m:sup>
@@ -40417,6 +40423,918 @@
                 </a14:m>
                 <a:endParaRPr lang="fr-FR" dirty="0"/>
               </a:p>
+              <a:p>
+                <a:pPr lvl="1"/>
+                <a:endParaRPr lang="fr-FR" dirty="0"/>
+              </a:p>
+              <a:p>
+                <a:pPr lvl="1"/>
+                <a:r>
+                  <a:rPr lang="fr-FR" dirty="0"/>
+                  <a:t>Au final, </a:t>
+                </a:r>
+                <a14:m>
+                  <m:oMath xmlns:m="http://schemas.openxmlformats.org/officeDocument/2006/math">
+                    <m:r>
+                      <a:rPr lang="fr-FR" i="1">
+                        <a:latin typeface="Cambria Math" panose="02040503050406030204" pitchFamily="18" charset="0"/>
+                      </a:rPr>
+                      <m:t>𝛾</m:t>
+                    </m:r>
+                    <m:d>
+                      <m:dPr>
+                        <m:ctrlPr>
+                          <a:rPr lang="fr-FR" i="1">
+                            <a:latin typeface="Cambria Math" panose="02040503050406030204" pitchFamily="18" charset="0"/>
+                          </a:rPr>
+                        </m:ctrlPr>
+                      </m:dPr>
+                      <m:e>
+                        <m:r>
+                          <a:rPr lang="fr-FR" i="1">
+                            <a:latin typeface="Cambria Math" panose="02040503050406030204" pitchFamily="18" charset="0"/>
+                          </a:rPr>
+                          <m:t>𝑡</m:t>
+                        </m:r>
+                      </m:e>
+                    </m:d>
+                    <m:r>
+                      <a:rPr lang="fr-FR" i="1">
+                        <a:latin typeface="Cambria Math" panose="02040503050406030204" pitchFamily="18" charset="0"/>
+                      </a:rPr>
+                      <m:t>=</m:t>
+                    </m:r>
+                    <m:d>
+                      <m:dPr>
+                        <m:ctrlPr>
+                          <a:rPr lang="fr-FR" i="1">
+                            <a:latin typeface="Cambria Math" panose="02040503050406030204" pitchFamily="18" charset="0"/>
+                          </a:rPr>
+                        </m:ctrlPr>
+                      </m:dPr>
+                      <m:e>
+                        <m:rad>
+                          <m:radPr>
+                            <m:degHide m:val="on"/>
+                            <m:ctrlPr>
+                              <a:rPr lang="fr-FR" i="1">
+                                <a:latin typeface="Cambria Math" panose="02040503050406030204" pitchFamily="18" charset="0"/>
+                              </a:rPr>
+                            </m:ctrlPr>
+                          </m:radPr>
+                          <m:deg/>
+                          <m:e>
+                            <m:sSup>
+                              <m:sSupPr>
+                                <m:ctrlPr>
+                                  <a:rPr lang="fr-FR" i="1">
+                                    <a:latin typeface="Cambria Math" panose="02040503050406030204" pitchFamily="18" charset="0"/>
+                                  </a:rPr>
+                                </m:ctrlPr>
+                              </m:sSupPr>
+                              <m:e>
+                                <m:r>
+                                  <a:rPr lang="fr-FR" i="1">
+                                    <a:latin typeface="Cambria Math" panose="02040503050406030204" pitchFamily="18" charset="0"/>
+                                  </a:rPr>
+                                  <m:t>𝑑</m:t>
+                                </m:r>
+                              </m:e>
+                              <m:sup>
+                                <m:r>
+                                  <a:rPr lang="fr-FR" i="1">
+                                    <a:latin typeface="Cambria Math" panose="02040503050406030204" pitchFamily="18" charset="0"/>
+                                  </a:rPr>
+                                  <m:t>2</m:t>
+                                </m:r>
+                              </m:sup>
+                            </m:sSup>
+                            <m:r>
+                              <a:rPr lang="fr-FR" i="1">
+                                <a:latin typeface="Cambria Math" panose="02040503050406030204" pitchFamily="18" charset="0"/>
+                              </a:rPr>
+                              <m:t>+</m:t>
+                            </m:r>
+                            <m:sSup>
+                              <m:sSupPr>
+                                <m:ctrlPr>
+                                  <a:rPr lang="fr-FR" i="1">
+                                    <a:latin typeface="Cambria Math" panose="02040503050406030204" pitchFamily="18" charset="0"/>
+                                  </a:rPr>
+                                </m:ctrlPr>
+                              </m:sSupPr>
+                              <m:e>
+                                <m:d>
+                                  <m:dPr>
+                                    <m:ctrlPr>
+                                      <a:rPr lang="fr-FR" i="1">
+                                        <a:latin typeface="Cambria Math" panose="02040503050406030204" pitchFamily="18" charset="0"/>
+                                      </a:rPr>
+                                    </m:ctrlPr>
+                                  </m:dPr>
+                                  <m:e>
+                                    <m:r>
+                                      <a:rPr lang="fr-FR" i="1">
+                                        <a:latin typeface="Cambria Math" panose="02040503050406030204" pitchFamily="18" charset="0"/>
+                                      </a:rPr>
+                                      <m:t>𝑏</m:t>
+                                    </m:r>
+                                    <m:r>
+                                      <a:rPr lang="fr-FR" i="1">
+                                        <a:latin typeface="Cambria Math" panose="02040503050406030204" pitchFamily="18" charset="0"/>
+                                      </a:rPr>
+                                      <m:t>+</m:t>
+                                    </m:r>
+                                    <m:r>
+                                      <a:rPr lang="fr-FR" i="1">
+                                        <a:latin typeface="Cambria Math" panose="02040503050406030204" pitchFamily="18" charset="0"/>
+                                      </a:rPr>
+                                      <m:t>𝑐</m:t>
+                                    </m:r>
+                                  </m:e>
+                                </m:d>
+                              </m:e>
+                              <m:sup>
+                                <m:r>
+                                  <a:rPr lang="fr-FR" i="1">
+                                    <a:latin typeface="Cambria Math" panose="02040503050406030204" pitchFamily="18" charset="0"/>
+                                  </a:rPr>
+                                  <m:t>2</m:t>
+                                </m:r>
+                              </m:sup>
+                            </m:sSup>
+                          </m:e>
+                        </m:rad>
+                        <m:r>
+                          <a:rPr lang="fr-FR" i="1">
+                            <a:latin typeface="Cambria Math" panose="02040503050406030204" pitchFamily="18" charset="0"/>
+                          </a:rPr>
+                          <m:t>−</m:t>
+                        </m:r>
+                        <m:rad>
+                          <m:radPr>
+                            <m:degHide m:val="on"/>
+                            <m:ctrlPr>
+                              <a:rPr lang="fr-FR" i="1">
+                                <a:latin typeface="Cambria Math" panose="02040503050406030204" pitchFamily="18" charset="0"/>
+                              </a:rPr>
+                            </m:ctrlPr>
+                          </m:radPr>
+                          <m:deg/>
+                          <m:e>
+                            <m:sSup>
+                              <m:sSupPr>
+                                <m:ctrlPr>
+                                  <a:rPr lang="fr-FR" i="1">
+                                    <a:latin typeface="Cambria Math" panose="02040503050406030204" pitchFamily="18" charset="0"/>
+                                  </a:rPr>
+                                </m:ctrlPr>
+                              </m:sSupPr>
+                              <m:e>
+                                <m:d>
+                                  <m:dPr>
+                                    <m:ctrlPr>
+                                      <a:rPr lang="fr-FR" i="1">
+                                        <a:latin typeface="Cambria Math" panose="02040503050406030204" pitchFamily="18" charset="0"/>
+                                      </a:rPr>
+                                    </m:ctrlPr>
+                                  </m:dPr>
+                                  <m:e>
+                                    <m:r>
+                                      <a:rPr lang="fr-FR" i="1">
+                                        <a:latin typeface="Cambria Math" panose="02040503050406030204" pitchFamily="18" charset="0"/>
+                                      </a:rPr>
+                                      <m:t>𝑎</m:t>
+                                    </m:r>
+                                    <m:r>
+                                      <a:rPr lang="fr-FR" i="1">
+                                        <a:latin typeface="Cambria Math" panose="02040503050406030204" pitchFamily="18" charset="0"/>
+                                      </a:rPr>
+                                      <m:t>+</m:t>
+                                    </m:r>
+                                    <m:r>
+                                      <a:rPr lang="fr-FR" i="1">
+                                        <a:latin typeface="Cambria Math" panose="02040503050406030204" pitchFamily="18" charset="0"/>
+                                      </a:rPr>
+                                      <m:t>𝑏</m:t>
+                                    </m:r>
+                                    <m:func>
+                                      <m:funcPr>
+                                        <m:ctrlPr>
+                                          <a:rPr lang="fr-FR" i="1">
+                                            <a:latin typeface="Cambria Math" panose="02040503050406030204" pitchFamily="18" charset="0"/>
+                                          </a:rPr>
+                                        </m:ctrlPr>
+                                      </m:funcPr>
+                                      <m:fName>
+                                        <m:r>
+                                          <m:rPr>
+                                            <m:sty m:val="p"/>
+                                          </m:rPr>
+                                          <a:rPr lang="fr-FR">
+                                            <a:latin typeface="Cambria Math" panose="02040503050406030204" pitchFamily="18" charset="0"/>
+                                          </a:rPr>
+                                          <m:t>cos</m:t>
+                                        </m:r>
+                                      </m:fName>
+                                      <m:e>
+                                        <m:sSup>
+                                          <m:sSupPr>
+                                            <m:ctrlPr>
+                                              <a:rPr lang="fr-FR" i="1">
+                                                <a:latin typeface="Cambria Math" panose="02040503050406030204" pitchFamily="18" charset="0"/>
+                                              </a:rPr>
+                                            </m:ctrlPr>
+                                          </m:sSupPr>
+                                          <m:e>
+                                            <m:r>
+                                              <a:rPr lang="fr-FR" i="1">
+                                                <a:latin typeface="Cambria Math" panose="02040503050406030204" pitchFamily="18" charset="0"/>
+                                              </a:rPr>
+                                              <m:t>𝜃</m:t>
+                                            </m:r>
+                                          </m:e>
+                                          <m:sup>
+                                            <m:r>
+                                              <a:rPr lang="fr-FR" i="1">
+                                                <a:latin typeface="Cambria Math" panose="02040503050406030204" pitchFamily="18" charset="0"/>
+                                              </a:rPr>
+                                              <m:t>′</m:t>
+                                            </m:r>
+                                          </m:sup>
+                                        </m:sSup>
+                                      </m:e>
+                                    </m:func>
+                                  </m:e>
+                                </m:d>
+                              </m:e>
+                              <m:sup>
+                                <m:r>
+                                  <a:rPr lang="fr-FR" i="1">
+                                    <a:latin typeface="Cambria Math" panose="02040503050406030204" pitchFamily="18" charset="0"/>
+                                  </a:rPr>
+                                  <m:t>2</m:t>
+                                </m:r>
+                              </m:sup>
+                            </m:sSup>
+                            <m:r>
+                              <a:rPr lang="fr-FR" i="1">
+                                <a:latin typeface="Cambria Math" panose="02040503050406030204" pitchFamily="18" charset="0"/>
+                              </a:rPr>
+                              <m:t>+</m:t>
+                            </m:r>
+                            <m:sSup>
+                              <m:sSupPr>
+                                <m:ctrlPr>
+                                  <a:rPr lang="fr-FR" i="1">
+                                    <a:latin typeface="Cambria Math" panose="02040503050406030204" pitchFamily="18" charset="0"/>
+                                  </a:rPr>
+                                </m:ctrlPr>
+                              </m:sSupPr>
+                              <m:e>
+                                <m:r>
+                                  <a:rPr lang="fr-FR" i="1">
+                                    <a:latin typeface="Cambria Math" panose="02040503050406030204" pitchFamily="18" charset="0"/>
+                                  </a:rPr>
+                                  <m:t>𝑏</m:t>
+                                </m:r>
+                              </m:e>
+                              <m:sup>
+                                <m:r>
+                                  <a:rPr lang="fr-FR" i="1">
+                                    <a:latin typeface="Cambria Math" panose="02040503050406030204" pitchFamily="18" charset="0"/>
+                                  </a:rPr>
+                                  <m:t>2</m:t>
+                                </m:r>
+                              </m:sup>
+                            </m:sSup>
+                            <m:func>
+                              <m:funcPr>
+                                <m:ctrlPr>
+                                  <a:rPr lang="fr-FR" i="1">
+                                    <a:latin typeface="Cambria Math" panose="02040503050406030204" pitchFamily="18" charset="0"/>
+                                  </a:rPr>
+                                </m:ctrlPr>
+                              </m:funcPr>
+                              <m:fName>
+                                <m:sSup>
+                                  <m:sSupPr>
+                                    <m:ctrlPr>
+                                      <a:rPr lang="fr-FR" i="1">
+                                        <a:latin typeface="Cambria Math" panose="02040503050406030204" pitchFamily="18" charset="0"/>
+                                      </a:rPr>
+                                    </m:ctrlPr>
+                                  </m:sSupPr>
+                                  <m:e>
+                                    <m:r>
+                                      <m:rPr>
+                                        <m:sty m:val="p"/>
+                                      </m:rPr>
+                                      <a:rPr lang="fr-FR">
+                                        <a:latin typeface="Cambria Math" panose="02040503050406030204" pitchFamily="18" charset="0"/>
+                                      </a:rPr>
+                                      <m:t>sin</m:t>
+                                    </m:r>
+                                  </m:e>
+                                  <m:sup>
+                                    <m:r>
+                                      <a:rPr lang="fr-FR" i="1">
+                                        <a:latin typeface="Cambria Math" panose="02040503050406030204" pitchFamily="18" charset="0"/>
+                                      </a:rPr>
+                                      <m:t>2</m:t>
+                                    </m:r>
+                                  </m:sup>
+                                </m:sSup>
+                              </m:fName>
+                              <m:e>
+                                <m:r>
+                                  <a:rPr lang="fr-FR" i="1">
+                                    <a:latin typeface="Cambria Math" panose="02040503050406030204" pitchFamily="18" charset="0"/>
+                                  </a:rPr>
+                                  <m:t>𝜃</m:t>
+                                </m:r>
+                                <m:r>
+                                  <a:rPr lang="fr-FR" i="1">
+                                    <a:latin typeface="Cambria Math" panose="02040503050406030204" pitchFamily="18" charset="0"/>
+                                  </a:rPr>
+                                  <m:t>′</m:t>
+                                </m:r>
+                              </m:e>
+                            </m:func>
+                          </m:e>
+                        </m:rad>
+                      </m:e>
+                    </m:d>
+                    <m:f>
+                      <m:fPr>
+                        <m:ctrlPr>
+                          <a:rPr lang="fr-FR" i="1">
+                            <a:latin typeface="Cambria Math" panose="02040503050406030204" pitchFamily="18" charset="0"/>
+                          </a:rPr>
+                        </m:ctrlPr>
+                      </m:fPr>
+                      <m:num>
+                        <m:r>
+                          <a:rPr lang="fr-FR" i="1">
+                            <a:latin typeface="Cambria Math" panose="02040503050406030204" pitchFamily="18" charset="0"/>
+                          </a:rPr>
+                          <m:t>2</m:t>
+                        </m:r>
+                        <m:r>
+                          <a:rPr lang="fr-FR" i="1">
+                            <a:latin typeface="Cambria Math" panose="02040503050406030204" pitchFamily="18" charset="0"/>
+                          </a:rPr>
+                          <m:t>𝜋</m:t>
+                        </m:r>
+                      </m:num>
+                      <m:den>
+                        <m:r>
+                          <a:rPr lang="fr-FR" i="1">
+                            <a:latin typeface="Cambria Math" panose="02040503050406030204" pitchFamily="18" charset="0"/>
+                          </a:rPr>
+                          <m:t>𝑝</m:t>
+                        </m:r>
+                      </m:den>
+                    </m:f>
+                    <m:r>
+                      <a:rPr lang="fr-FR" i="1">
+                        <a:latin typeface="Cambria Math" panose="02040503050406030204" pitchFamily="18" charset="0"/>
+                      </a:rPr>
+                      <m:t>=</m:t>
+                    </m:r>
+                    <m:d>
+                      <m:dPr>
+                        <m:ctrlPr>
+                          <a:rPr lang="fr-FR" i="1">
+                            <a:latin typeface="Cambria Math" panose="02040503050406030204" pitchFamily="18" charset="0"/>
+                          </a:rPr>
+                        </m:ctrlPr>
+                      </m:dPr>
+                      <m:e>
+                        <m:rad>
+                          <m:radPr>
+                            <m:degHide m:val="on"/>
+                            <m:ctrlPr>
+                              <a:rPr lang="fr-FR" i="1">
+                                <a:latin typeface="Cambria Math" panose="02040503050406030204" pitchFamily="18" charset="0"/>
+                              </a:rPr>
+                            </m:ctrlPr>
+                          </m:radPr>
+                          <m:deg/>
+                          <m:e>
+                            <m:sSup>
+                              <m:sSupPr>
+                                <m:ctrlPr>
+                                  <a:rPr lang="fr-FR" i="1">
+                                    <a:latin typeface="Cambria Math" panose="02040503050406030204" pitchFamily="18" charset="0"/>
+                                  </a:rPr>
+                                </m:ctrlPr>
+                              </m:sSupPr>
+                              <m:e>
+                                <m:r>
+                                  <a:rPr lang="fr-FR" i="1">
+                                    <a:latin typeface="Cambria Math" panose="02040503050406030204" pitchFamily="18" charset="0"/>
+                                  </a:rPr>
+                                  <m:t>𝑑</m:t>
+                                </m:r>
+                              </m:e>
+                              <m:sup>
+                                <m:r>
+                                  <a:rPr lang="fr-FR" i="1">
+                                    <a:latin typeface="Cambria Math" panose="02040503050406030204" pitchFamily="18" charset="0"/>
+                                  </a:rPr>
+                                  <m:t>2</m:t>
+                                </m:r>
+                              </m:sup>
+                            </m:sSup>
+                            <m:r>
+                              <a:rPr lang="fr-FR" i="1">
+                                <a:latin typeface="Cambria Math" panose="02040503050406030204" pitchFamily="18" charset="0"/>
+                              </a:rPr>
+                              <m:t>+</m:t>
+                            </m:r>
+                            <m:sSup>
+                              <m:sSupPr>
+                                <m:ctrlPr>
+                                  <a:rPr lang="fr-FR" i="1">
+                                    <a:latin typeface="Cambria Math" panose="02040503050406030204" pitchFamily="18" charset="0"/>
+                                  </a:rPr>
+                                </m:ctrlPr>
+                              </m:sSupPr>
+                              <m:e>
+                                <m:d>
+                                  <m:dPr>
+                                    <m:ctrlPr>
+                                      <a:rPr lang="fr-FR" i="1">
+                                        <a:latin typeface="Cambria Math" panose="02040503050406030204" pitchFamily="18" charset="0"/>
+                                      </a:rPr>
+                                    </m:ctrlPr>
+                                  </m:dPr>
+                                  <m:e>
+                                    <m:r>
+                                      <a:rPr lang="fr-FR" i="1">
+                                        <a:latin typeface="Cambria Math" panose="02040503050406030204" pitchFamily="18" charset="0"/>
+                                      </a:rPr>
+                                      <m:t>𝑏</m:t>
+                                    </m:r>
+                                    <m:r>
+                                      <a:rPr lang="fr-FR" i="1">
+                                        <a:latin typeface="Cambria Math" panose="02040503050406030204" pitchFamily="18" charset="0"/>
+                                      </a:rPr>
+                                      <m:t>+</m:t>
+                                    </m:r>
+                                    <m:r>
+                                      <a:rPr lang="fr-FR" i="1">
+                                        <a:latin typeface="Cambria Math" panose="02040503050406030204" pitchFamily="18" charset="0"/>
+                                      </a:rPr>
+                                      <m:t>𝑐</m:t>
+                                    </m:r>
+                                  </m:e>
+                                </m:d>
+                              </m:e>
+                              <m:sup>
+                                <m:r>
+                                  <a:rPr lang="fr-FR" i="1">
+                                    <a:latin typeface="Cambria Math" panose="02040503050406030204" pitchFamily="18" charset="0"/>
+                                  </a:rPr>
+                                  <m:t>2</m:t>
+                                </m:r>
+                              </m:sup>
+                            </m:sSup>
+                          </m:e>
+                        </m:rad>
+                        <m:r>
+                          <a:rPr lang="fr-FR" i="1">
+                            <a:latin typeface="Cambria Math" panose="02040503050406030204" pitchFamily="18" charset="0"/>
+                          </a:rPr>
+                          <m:t>−</m:t>
+                        </m:r>
+                        <m:rad>
+                          <m:radPr>
+                            <m:degHide m:val="on"/>
+                            <m:ctrlPr>
+                              <a:rPr lang="fr-FR" i="1">
+                                <a:latin typeface="Cambria Math" panose="02040503050406030204" pitchFamily="18" charset="0"/>
+                              </a:rPr>
+                            </m:ctrlPr>
+                          </m:radPr>
+                          <m:deg/>
+                          <m:e>
+                            <m:sSup>
+                              <m:sSupPr>
+                                <m:ctrlPr>
+                                  <a:rPr lang="fr-FR" i="1">
+                                    <a:latin typeface="Cambria Math" panose="02040503050406030204" pitchFamily="18" charset="0"/>
+                                  </a:rPr>
+                                </m:ctrlPr>
+                              </m:sSupPr>
+                              <m:e>
+                                <m:d>
+                                  <m:dPr>
+                                    <m:ctrlPr>
+                                      <a:rPr lang="fr-FR" i="1">
+                                        <a:latin typeface="Cambria Math" panose="02040503050406030204" pitchFamily="18" charset="0"/>
+                                      </a:rPr>
+                                    </m:ctrlPr>
+                                  </m:dPr>
+                                  <m:e>
+                                    <m:r>
+                                      <a:rPr lang="fr-FR" i="1">
+                                        <a:latin typeface="Cambria Math" panose="02040503050406030204" pitchFamily="18" charset="0"/>
+                                      </a:rPr>
+                                      <m:t>𝑎</m:t>
+                                    </m:r>
+                                    <m:r>
+                                      <a:rPr lang="fr-FR" i="1">
+                                        <a:latin typeface="Cambria Math" panose="02040503050406030204" pitchFamily="18" charset="0"/>
+                                      </a:rPr>
+                                      <m:t>+</m:t>
+                                    </m:r>
+                                    <m:r>
+                                      <a:rPr lang="fr-FR" i="1">
+                                        <a:latin typeface="Cambria Math" panose="02040503050406030204" pitchFamily="18" charset="0"/>
+                                      </a:rPr>
+                                      <m:t>𝑏</m:t>
+                                    </m:r>
+                                    <m:func>
+                                      <m:funcPr>
+                                        <m:ctrlPr>
+                                          <a:rPr lang="fr-FR" i="1">
+                                            <a:latin typeface="Cambria Math" panose="02040503050406030204" pitchFamily="18" charset="0"/>
+                                          </a:rPr>
+                                        </m:ctrlPr>
+                                      </m:funcPr>
+                                      <m:fName>
+                                        <m:r>
+                                          <m:rPr>
+                                            <m:sty m:val="p"/>
+                                          </m:rPr>
+                                          <a:rPr lang="fr-FR">
+                                            <a:latin typeface="Cambria Math" panose="02040503050406030204" pitchFamily="18" charset="0"/>
+                                          </a:rPr>
+                                          <m:t>cos</m:t>
+                                        </m:r>
+                                      </m:fName>
+                                      <m:e>
+                                        <m:d>
+                                          <m:dPr>
+                                            <m:ctrlPr>
+                                              <a:rPr lang="fr-FR" i="1" smtClean="0">
+                                                <a:latin typeface="Cambria Math" panose="02040503050406030204" pitchFamily="18" charset="0"/>
+                                              </a:rPr>
+                                            </m:ctrlPr>
+                                          </m:dPr>
+                                          <m:e>
+                                            <m:func>
+                                              <m:funcPr>
+                                                <m:ctrlPr>
+                                                  <a:rPr lang="fr-FR" i="1">
+                                                    <a:latin typeface="Cambria Math" panose="02040503050406030204" pitchFamily="18" charset="0"/>
+                                                  </a:rPr>
+                                                </m:ctrlPr>
+                                              </m:funcPr>
+                                              <m:fName>
+                                                <m:sSup>
+                                                  <m:sSupPr>
+                                                    <m:ctrlPr>
+                                                      <a:rPr lang="fr-FR" i="1">
+                                                        <a:latin typeface="Cambria Math" panose="02040503050406030204" pitchFamily="18" charset="0"/>
+                                                      </a:rPr>
+                                                    </m:ctrlPr>
+                                                  </m:sSupPr>
+                                                  <m:e>
+                                                    <m:r>
+                                                      <m:rPr>
+                                                        <m:sty m:val="p"/>
+                                                      </m:rPr>
+                                                      <a:rPr lang="fr-FR">
+                                                        <a:latin typeface="Cambria Math" panose="02040503050406030204" pitchFamily="18" charset="0"/>
+                                                      </a:rPr>
+                                                      <m:t>tan</m:t>
+                                                    </m:r>
+                                                  </m:e>
+                                                  <m:sup>
+                                                    <m:r>
+                                                      <a:rPr lang="fr-FR" i="1">
+                                                        <a:latin typeface="Cambria Math" panose="02040503050406030204" pitchFamily="18" charset="0"/>
+                                                      </a:rPr>
+                                                      <m:t>−1</m:t>
+                                                    </m:r>
+                                                  </m:sup>
+                                                </m:sSup>
+                                              </m:fName>
+                                              <m:e>
+                                                <m:d>
+                                                  <m:dPr>
+                                                    <m:ctrlPr>
+                                                      <a:rPr lang="fr-FR" i="1">
+                                                        <a:latin typeface="Cambria Math" panose="02040503050406030204" pitchFamily="18" charset="0"/>
+                                                      </a:rPr>
+                                                    </m:ctrlPr>
+                                                  </m:dPr>
+                                                  <m:e>
+                                                    <m:f>
+                                                      <m:fPr>
+                                                        <m:ctrlPr>
+                                                          <a:rPr lang="fr-FR" i="1">
+                                                            <a:latin typeface="Cambria Math" panose="02040503050406030204" pitchFamily="18" charset="0"/>
+                                                          </a:rPr>
+                                                        </m:ctrlPr>
+                                                      </m:fPr>
+                                                      <m:num>
+                                                        <m:r>
+                                                          <a:rPr lang="fr-FR" i="1">
+                                                            <a:latin typeface="Cambria Math" panose="02040503050406030204" pitchFamily="18" charset="0"/>
+                                                          </a:rPr>
+                                                          <m:t>𝑑</m:t>
+                                                        </m:r>
+                                                      </m:num>
+                                                      <m:den>
+                                                        <m:r>
+                                                          <a:rPr lang="fr-FR" i="1">
+                                                            <a:latin typeface="Cambria Math" panose="02040503050406030204" pitchFamily="18" charset="0"/>
+                                                          </a:rPr>
+                                                          <m:t>𝑐</m:t>
+                                                        </m:r>
+                                                      </m:den>
+                                                    </m:f>
+                                                  </m:e>
+                                                </m:d>
+                                              </m:e>
+                                            </m:func>
+                                            <m:r>
+                                              <a:rPr lang="fr-FR" i="1">
+                                                <a:latin typeface="Cambria Math" panose="02040503050406030204" pitchFamily="18" charset="0"/>
+                                              </a:rPr>
+                                              <m:t>+</m:t>
+                                            </m:r>
+                                            <m:r>
+                                              <a:rPr lang="fr-FR" i="1">
+                                                <a:latin typeface="Cambria Math" panose="02040503050406030204" pitchFamily="18" charset="0"/>
+                                              </a:rPr>
+                                              <m:t>𝜃</m:t>
+                                            </m:r>
+                                            <m:d>
+                                              <m:dPr>
+                                                <m:ctrlPr>
+                                                  <a:rPr lang="fr-FR" i="1">
+                                                    <a:latin typeface="Cambria Math" panose="02040503050406030204" pitchFamily="18" charset="0"/>
+                                                  </a:rPr>
+                                                </m:ctrlPr>
+                                              </m:dPr>
+                                              <m:e>
+                                                <m:r>
+                                                  <a:rPr lang="fr-FR" i="1">
+                                                    <a:latin typeface="Cambria Math" panose="02040503050406030204" pitchFamily="18" charset="0"/>
+                                                  </a:rPr>
+                                                  <m:t>𝑡</m:t>
+                                                </m:r>
+                                              </m:e>
+                                            </m:d>
+                                          </m:e>
+                                        </m:d>
+                                      </m:e>
+                                    </m:func>
+                                  </m:e>
+                                </m:d>
+                              </m:e>
+                              <m:sup>
+                                <m:r>
+                                  <a:rPr lang="fr-FR" i="1">
+                                    <a:latin typeface="Cambria Math" panose="02040503050406030204" pitchFamily="18" charset="0"/>
+                                  </a:rPr>
+                                  <m:t>2</m:t>
+                                </m:r>
+                              </m:sup>
+                            </m:sSup>
+                            <m:r>
+                              <a:rPr lang="fr-FR" i="1">
+                                <a:latin typeface="Cambria Math" panose="02040503050406030204" pitchFamily="18" charset="0"/>
+                              </a:rPr>
+                              <m:t>+</m:t>
+                            </m:r>
+                            <m:sSup>
+                              <m:sSupPr>
+                                <m:ctrlPr>
+                                  <a:rPr lang="fr-FR" i="1">
+                                    <a:latin typeface="Cambria Math" panose="02040503050406030204" pitchFamily="18" charset="0"/>
+                                  </a:rPr>
+                                </m:ctrlPr>
+                              </m:sSupPr>
+                              <m:e>
+                                <m:r>
+                                  <a:rPr lang="fr-FR" i="1">
+                                    <a:latin typeface="Cambria Math" panose="02040503050406030204" pitchFamily="18" charset="0"/>
+                                  </a:rPr>
+                                  <m:t>𝑏</m:t>
+                                </m:r>
+                              </m:e>
+                              <m:sup>
+                                <m:r>
+                                  <a:rPr lang="fr-FR" i="1">
+                                    <a:latin typeface="Cambria Math" panose="02040503050406030204" pitchFamily="18" charset="0"/>
+                                  </a:rPr>
+                                  <m:t>2</m:t>
+                                </m:r>
+                              </m:sup>
+                            </m:sSup>
+                            <m:func>
+                              <m:funcPr>
+                                <m:ctrlPr>
+                                  <a:rPr lang="fr-FR" i="1">
+                                    <a:latin typeface="Cambria Math" panose="02040503050406030204" pitchFamily="18" charset="0"/>
+                                  </a:rPr>
+                                </m:ctrlPr>
+                              </m:funcPr>
+                              <m:fName>
+                                <m:sSup>
+                                  <m:sSupPr>
+                                    <m:ctrlPr>
+                                      <a:rPr lang="fr-FR" i="1">
+                                        <a:latin typeface="Cambria Math" panose="02040503050406030204" pitchFamily="18" charset="0"/>
+                                      </a:rPr>
+                                    </m:ctrlPr>
+                                  </m:sSupPr>
+                                  <m:e>
+                                    <m:r>
+                                      <m:rPr>
+                                        <m:sty m:val="p"/>
+                                      </m:rPr>
+                                      <a:rPr lang="fr-FR">
+                                        <a:latin typeface="Cambria Math" panose="02040503050406030204" pitchFamily="18" charset="0"/>
+                                      </a:rPr>
+                                      <m:t>sin</m:t>
+                                    </m:r>
+                                  </m:e>
+                                  <m:sup>
+                                    <m:r>
+                                      <a:rPr lang="fr-FR" i="1">
+                                        <a:latin typeface="Cambria Math" panose="02040503050406030204" pitchFamily="18" charset="0"/>
+                                      </a:rPr>
+                                      <m:t>2</m:t>
+                                    </m:r>
+                                  </m:sup>
+                                </m:sSup>
+                              </m:fName>
+                              <m:e>
+                                <m:d>
+                                  <m:dPr>
+                                    <m:ctrlPr>
+                                      <a:rPr lang="fr-FR" i="1" smtClean="0">
+                                        <a:latin typeface="Cambria Math" panose="02040503050406030204" pitchFamily="18" charset="0"/>
+                                      </a:rPr>
+                                    </m:ctrlPr>
+                                  </m:dPr>
+                                  <m:e>
+                                    <m:func>
+                                      <m:funcPr>
+                                        <m:ctrlPr>
+                                          <a:rPr lang="fr-FR" i="1">
+                                            <a:latin typeface="Cambria Math" panose="02040503050406030204" pitchFamily="18" charset="0"/>
+                                          </a:rPr>
+                                        </m:ctrlPr>
+                                      </m:funcPr>
+                                      <m:fName>
+                                        <m:sSup>
+                                          <m:sSupPr>
+                                            <m:ctrlPr>
+                                              <a:rPr lang="fr-FR" i="1">
+                                                <a:latin typeface="Cambria Math" panose="02040503050406030204" pitchFamily="18" charset="0"/>
+                                              </a:rPr>
+                                            </m:ctrlPr>
+                                          </m:sSupPr>
+                                          <m:e>
+                                            <m:r>
+                                              <m:rPr>
+                                                <m:sty m:val="p"/>
+                                              </m:rPr>
+                                              <a:rPr lang="fr-FR">
+                                                <a:latin typeface="Cambria Math" panose="02040503050406030204" pitchFamily="18" charset="0"/>
+                                              </a:rPr>
+                                              <m:t>tan</m:t>
+                                            </m:r>
+                                          </m:e>
+                                          <m:sup>
+                                            <m:r>
+                                              <a:rPr lang="fr-FR" i="1">
+                                                <a:latin typeface="Cambria Math" panose="02040503050406030204" pitchFamily="18" charset="0"/>
+                                              </a:rPr>
+                                              <m:t>−1</m:t>
+                                            </m:r>
+                                          </m:sup>
+                                        </m:sSup>
+                                      </m:fName>
+                                      <m:e>
+                                        <m:d>
+                                          <m:dPr>
+                                            <m:ctrlPr>
+                                              <a:rPr lang="fr-FR" i="1">
+                                                <a:latin typeface="Cambria Math" panose="02040503050406030204" pitchFamily="18" charset="0"/>
+                                              </a:rPr>
+                                            </m:ctrlPr>
+                                          </m:dPr>
+                                          <m:e>
+                                            <m:f>
+                                              <m:fPr>
+                                                <m:ctrlPr>
+                                                  <a:rPr lang="fr-FR" i="1">
+                                                    <a:latin typeface="Cambria Math" panose="02040503050406030204" pitchFamily="18" charset="0"/>
+                                                  </a:rPr>
+                                                </m:ctrlPr>
+                                              </m:fPr>
+                                              <m:num>
+                                                <m:r>
+                                                  <a:rPr lang="fr-FR" i="1">
+                                                    <a:latin typeface="Cambria Math" panose="02040503050406030204" pitchFamily="18" charset="0"/>
+                                                  </a:rPr>
+                                                  <m:t>𝑑</m:t>
+                                                </m:r>
+                                              </m:num>
+                                              <m:den>
+                                                <m:r>
+                                                  <a:rPr lang="fr-FR" i="1">
+                                                    <a:latin typeface="Cambria Math" panose="02040503050406030204" pitchFamily="18" charset="0"/>
+                                                  </a:rPr>
+                                                  <m:t>𝑐</m:t>
+                                                </m:r>
+                                              </m:den>
+                                            </m:f>
+                                          </m:e>
+                                        </m:d>
+                                      </m:e>
+                                    </m:func>
+                                    <m:r>
+                                      <a:rPr lang="fr-FR" i="1">
+                                        <a:latin typeface="Cambria Math" panose="02040503050406030204" pitchFamily="18" charset="0"/>
+                                      </a:rPr>
+                                      <m:t>+</m:t>
+                                    </m:r>
+                                    <m:r>
+                                      <a:rPr lang="fr-FR" i="1">
+                                        <a:latin typeface="Cambria Math" panose="02040503050406030204" pitchFamily="18" charset="0"/>
+                                      </a:rPr>
+                                      <m:t>𝜃</m:t>
+                                    </m:r>
+                                    <m:d>
+                                      <m:dPr>
+                                        <m:ctrlPr>
+                                          <a:rPr lang="fr-FR" i="1">
+                                            <a:latin typeface="Cambria Math" panose="02040503050406030204" pitchFamily="18" charset="0"/>
+                                          </a:rPr>
+                                        </m:ctrlPr>
+                                      </m:dPr>
+                                      <m:e>
+                                        <m:r>
+                                          <a:rPr lang="fr-FR" i="1">
+                                            <a:latin typeface="Cambria Math" panose="02040503050406030204" pitchFamily="18" charset="0"/>
+                                          </a:rPr>
+                                          <m:t>𝑡</m:t>
+                                        </m:r>
+                                      </m:e>
+                                    </m:d>
+                                  </m:e>
+                                </m:d>
+                              </m:e>
+                            </m:func>
+                          </m:e>
+                        </m:rad>
+                      </m:e>
+                    </m:d>
+                    <m:f>
+                      <m:fPr>
+                        <m:ctrlPr>
+                          <a:rPr lang="fr-FR" i="1">
+                            <a:latin typeface="Cambria Math" panose="02040503050406030204" pitchFamily="18" charset="0"/>
+                          </a:rPr>
+                        </m:ctrlPr>
+                      </m:fPr>
+                      <m:num>
+                        <m:r>
+                          <a:rPr lang="fr-FR" i="1">
+                            <a:latin typeface="Cambria Math" panose="02040503050406030204" pitchFamily="18" charset="0"/>
+                          </a:rPr>
+                          <m:t>2</m:t>
+                        </m:r>
+                        <m:r>
+                          <a:rPr lang="fr-FR" i="1">
+                            <a:latin typeface="Cambria Math" panose="02040503050406030204" pitchFamily="18" charset="0"/>
+                          </a:rPr>
+                          <m:t>𝜋</m:t>
+                        </m:r>
+                      </m:num>
+                      <m:den>
+                        <m:r>
+                          <a:rPr lang="fr-FR" i="1">
+                            <a:latin typeface="Cambria Math" panose="02040503050406030204" pitchFamily="18" charset="0"/>
+                          </a:rPr>
+                          <m:t>𝑝</m:t>
+                        </m:r>
+                      </m:den>
+                    </m:f>
+                  </m:oMath>
+                </a14:m>
+                <a:endParaRPr lang="fr-FR" dirty="0"/>
+              </a:p>
             </p:txBody>
           </p:sp>
         </mc:Choice>
@@ -40445,7 +41363,7 @@
               <a:blipFill>
                 <a:blip r:embed="rId3"/>
                 <a:stretch>
-                  <a:fillRect l="-1259"/>
+                  <a:fillRect l="-4109"/>
                 </a:stretch>
               </a:blipFill>
             </p:spPr>
@@ -40672,8 +41590,8 @@
           </p:sp>
         </mc:Fallback>
       </mc:AlternateContent>
-      <mc:AlternateContent xmlns:mc="http://schemas.openxmlformats.org/markup-compatibility/2006" xmlns:a14="http://schemas.microsoft.com/office/drawing/2010/main">
-        <mc:Choice Requires="a14">
+      <mc:AlternateContent xmlns:mc="http://schemas.openxmlformats.org/markup-compatibility/2006">
+        <mc:Choice xmlns:a14="http://schemas.microsoft.com/office/drawing/2010/main" Requires="a14">
           <p:sp>
             <p:nvSpPr>
               <p:cNvPr id="3" name="Espace réservé du contenu 2">
@@ -40698,7 +41616,7 @@
             </p:spPr>
             <p:txBody>
               <a:bodyPr>
-                <a:normAutofit fontScale="92500"/>
+                <a:normAutofit fontScale="70000" lnSpcReduction="20000"/>
               </a:bodyPr>
               <a:lstStyle/>
               <a:p>
@@ -40795,6 +41713,146 @@
                     </m:func>
                   </m:oMath>
                 </a14:m>
+                <a:endParaRPr lang="fr-FR" b="0" i="1" dirty="0">
+                  <a:latin typeface="Cambria Math" panose="02040503050406030204" pitchFamily="18" charset="0"/>
+                </a:endParaRPr>
+              </a:p>
+              <a:p>
+                <a14:m>
+                  <m:oMath xmlns:m="http://schemas.openxmlformats.org/officeDocument/2006/math">
+                    <m:sSub>
+                      <m:sSubPr>
+                        <m:ctrlPr>
+                          <a:rPr lang="fr-FR" i="1">
+                            <a:latin typeface="Cambria Math" panose="02040503050406030204" pitchFamily="18" charset="0"/>
+                          </a:rPr>
+                        </m:ctrlPr>
+                      </m:sSubPr>
+                      <m:e>
+                        <m:r>
+                          <a:rPr lang="fr-FR" i="1">
+                            <a:latin typeface="Cambria Math" panose="02040503050406030204" pitchFamily="18" charset="0"/>
+                          </a:rPr>
+                          <m:t>𝜆</m:t>
+                        </m:r>
+                      </m:e>
+                      <m:sub>
+                        <m:r>
+                          <a:rPr lang="fr-FR" i="1">
+                            <a:latin typeface="Cambria Math" panose="02040503050406030204" pitchFamily="18" charset="0"/>
+                          </a:rPr>
+                          <m:t>0</m:t>
+                        </m:r>
+                      </m:sub>
+                    </m:sSub>
+                    <m:r>
+                      <a:rPr lang="fr-FR" i="1">
+                        <a:latin typeface="Cambria Math" panose="02040503050406030204" pitchFamily="18" charset="0"/>
+                      </a:rPr>
+                      <m:t>=</m:t>
+                    </m:r>
+                    <m:rad>
+                      <m:radPr>
+                        <m:degHide m:val="on"/>
+                        <m:ctrlPr>
+                          <a:rPr lang="fr-FR" i="1">
+                            <a:latin typeface="Cambria Math" panose="02040503050406030204" pitchFamily="18" charset="0"/>
+                          </a:rPr>
+                        </m:ctrlPr>
+                      </m:radPr>
+                      <m:deg/>
+                      <m:e>
+                        <m:sSup>
+                          <m:sSupPr>
+                            <m:ctrlPr>
+                              <a:rPr lang="fr-FR" i="1">
+                                <a:latin typeface="Cambria Math" panose="02040503050406030204" pitchFamily="18" charset="0"/>
+                              </a:rPr>
+                            </m:ctrlPr>
+                          </m:sSupPr>
+                          <m:e>
+                            <m:r>
+                              <a:rPr lang="fr-FR" i="1">
+                                <a:latin typeface="Cambria Math" panose="02040503050406030204" pitchFamily="18" charset="0"/>
+                              </a:rPr>
+                              <m:t>𝑑</m:t>
+                            </m:r>
+                          </m:e>
+                          <m:sup>
+                            <m:r>
+                              <a:rPr lang="fr-FR" i="1">
+                                <a:latin typeface="Cambria Math" panose="02040503050406030204" pitchFamily="18" charset="0"/>
+                              </a:rPr>
+                              <m:t>2</m:t>
+                            </m:r>
+                          </m:sup>
+                        </m:sSup>
+                        <m:r>
+                          <a:rPr lang="fr-FR" i="1">
+                            <a:latin typeface="Cambria Math" panose="02040503050406030204" pitchFamily="18" charset="0"/>
+                          </a:rPr>
+                          <m:t>+</m:t>
+                        </m:r>
+                        <m:sSup>
+                          <m:sSupPr>
+                            <m:ctrlPr>
+                              <a:rPr lang="fr-FR" i="1">
+                                <a:latin typeface="Cambria Math" panose="02040503050406030204" pitchFamily="18" charset="0"/>
+                              </a:rPr>
+                            </m:ctrlPr>
+                          </m:sSupPr>
+                          <m:e>
+                            <m:d>
+                              <m:dPr>
+                                <m:ctrlPr>
+                                  <a:rPr lang="fr-FR" i="1">
+                                    <a:latin typeface="Cambria Math" panose="02040503050406030204" pitchFamily="18" charset="0"/>
+                                  </a:rPr>
+                                </m:ctrlPr>
+                              </m:dPr>
+                              <m:e>
+                                <m:r>
+                                  <a:rPr lang="fr-FR" i="1">
+                                    <a:latin typeface="Cambria Math" panose="02040503050406030204" pitchFamily="18" charset="0"/>
+                                  </a:rPr>
+                                  <m:t>𝑏</m:t>
+                                </m:r>
+                                <m:r>
+                                  <a:rPr lang="fr-FR" i="1">
+                                    <a:latin typeface="Cambria Math" panose="02040503050406030204" pitchFamily="18" charset="0"/>
+                                  </a:rPr>
+                                  <m:t>+</m:t>
+                                </m:r>
+                                <m:r>
+                                  <a:rPr lang="fr-FR" i="1">
+                                    <a:latin typeface="Cambria Math" panose="02040503050406030204" pitchFamily="18" charset="0"/>
+                                  </a:rPr>
+                                  <m:t>𝑐</m:t>
+                                </m:r>
+                              </m:e>
+                            </m:d>
+                          </m:e>
+                          <m:sup>
+                            <m:r>
+                              <a:rPr lang="fr-FR" i="1">
+                                <a:latin typeface="Cambria Math" panose="02040503050406030204" pitchFamily="18" charset="0"/>
+                              </a:rPr>
+                              <m:t>2</m:t>
+                            </m:r>
+                          </m:sup>
+                        </m:sSup>
+                      </m:e>
+                    </m:rad>
+                  </m:oMath>
+                </a14:m>
+                <a:endParaRPr lang="fr-FR" i="1" dirty="0">
+                  <a:latin typeface="Cambria Math" panose="02040503050406030204" pitchFamily="18" charset="0"/>
+                </a:endParaRPr>
+              </a:p>
+              <a:p>
+                <a:pPr marL="1588" indent="0">
+                  <a:buNone/>
+                </a:pPr>
                 <a:endParaRPr lang="fr-FR" b="0" i="1" dirty="0">
                   <a:latin typeface="Cambria Math" panose="02040503050406030204" pitchFamily="18" charset="0"/>
                 </a:endParaRPr>
@@ -43476,10 +44534,434 @@
                 </a14:m>
                 <a:endParaRPr lang="fr-FR" dirty="0"/>
               </a:p>
+              <a:p>
+                <a:pPr lvl="1"/>
+                <a:endParaRPr lang="fr-FR" dirty="0"/>
+              </a:p>
+              <a:p>
+                <a:pPr lvl="1"/>
+                <a14:m>
+                  <m:oMath xmlns:m="http://schemas.openxmlformats.org/officeDocument/2006/math">
+                    <m:r>
+                      <a:rPr lang="fr-FR" i="1">
+                        <a:latin typeface="Cambria Math" panose="02040503050406030204" pitchFamily="18" charset="0"/>
+                      </a:rPr>
+                      <m:t>𝜃</m:t>
+                    </m:r>
+                    <m:d>
+                      <m:dPr>
+                        <m:ctrlPr>
+                          <a:rPr lang="fr-FR" i="1">
+                            <a:latin typeface="Cambria Math" panose="02040503050406030204" pitchFamily="18" charset="0"/>
+                          </a:rPr>
+                        </m:ctrlPr>
+                      </m:dPr>
+                      <m:e>
+                        <m:r>
+                          <a:rPr lang="fr-FR" i="1">
+                            <a:latin typeface="Cambria Math" panose="02040503050406030204" pitchFamily="18" charset="0"/>
+                          </a:rPr>
+                          <m:t>𝑡</m:t>
+                        </m:r>
+                      </m:e>
+                    </m:d>
+                    <m:r>
+                      <a:rPr lang="fr-FR" b="0" i="1" smtClean="0">
+                        <a:latin typeface="Cambria Math" panose="02040503050406030204" pitchFamily="18" charset="0"/>
+                      </a:rPr>
+                      <m:t>=</m:t>
+                    </m:r>
+                    <m:func>
+                      <m:funcPr>
+                        <m:ctrlPr>
+                          <a:rPr lang="fr-FR" i="1">
+                            <a:latin typeface="Cambria Math" panose="02040503050406030204" pitchFamily="18" charset="0"/>
+                          </a:rPr>
+                        </m:ctrlPr>
+                      </m:funcPr>
+                      <m:fName>
+                        <m:sSup>
+                          <m:sSupPr>
+                            <m:ctrlPr>
+                              <a:rPr lang="fr-FR" i="1">
+                                <a:latin typeface="Cambria Math" panose="02040503050406030204" pitchFamily="18" charset="0"/>
+                              </a:rPr>
+                            </m:ctrlPr>
+                          </m:sSupPr>
+                          <m:e>
+                            <m:r>
+                              <m:rPr>
+                                <m:sty m:val="p"/>
+                              </m:rPr>
+                              <a:rPr lang="fr-FR">
+                                <a:latin typeface="Cambria Math" panose="02040503050406030204" pitchFamily="18" charset="0"/>
+                              </a:rPr>
+                              <m:t>cos</m:t>
+                            </m:r>
+                          </m:e>
+                          <m:sup>
+                            <m:r>
+                              <a:rPr lang="fr-FR" i="1">
+                                <a:latin typeface="Cambria Math" panose="02040503050406030204" pitchFamily="18" charset="0"/>
+                              </a:rPr>
+                              <m:t>−1</m:t>
+                            </m:r>
+                          </m:sup>
+                        </m:sSup>
+                      </m:fName>
+                      <m:e>
+                        <m:d>
+                          <m:dPr>
+                            <m:ctrlPr>
+                              <a:rPr lang="fr-FR" i="1">
+                                <a:latin typeface="Cambria Math" panose="02040503050406030204" pitchFamily="18" charset="0"/>
+                              </a:rPr>
+                            </m:ctrlPr>
+                          </m:dPr>
+                          <m:e>
+                            <m:f>
+                              <m:fPr>
+                                <m:ctrlPr>
+                                  <a:rPr lang="fr-FR" i="1">
+                                    <a:latin typeface="Cambria Math" panose="02040503050406030204" pitchFamily="18" charset="0"/>
+                                  </a:rPr>
+                                </m:ctrlPr>
+                              </m:fPr>
+                              <m:num>
+                                <m:d>
+                                  <m:dPr>
+                                    <m:ctrlPr>
+                                      <a:rPr lang="fr-FR" i="1" smtClean="0">
+                                        <a:latin typeface="Cambria Math" panose="02040503050406030204" pitchFamily="18" charset="0"/>
+                                      </a:rPr>
+                                    </m:ctrlPr>
+                                  </m:dPr>
+                                  <m:e>
+                                    <m:rad>
+                                      <m:radPr>
+                                        <m:degHide m:val="on"/>
+                                        <m:ctrlPr>
+                                          <a:rPr lang="fr-FR" i="1">
+                                            <a:latin typeface="Cambria Math" panose="02040503050406030204" pitchFamily="18" charset="0"/>
+                                          </a:rPr>
+                                        </m:ctrlPr>
+                                      </m:radPr>
+                                      <m:deg/>
+                                      <m:e>
+                                        <m:sSup>
+                                          <m:sSupPr>
+                                            <m:ctrlPr>
+                                              <a:rPr lang="fr-FR" i="1">
+                                                <a:latin typeface="Cambria Math" panose="02040503050406030204" pitchFamily="18" charset="0"/>
+                                              </a:rPr>
+                                            </m:ctrlPr>
+                                          </m:sSupPr>
+                                          <m:e>
+                                            <m:r>
+                                              <a:rPr lang="fr-FR" i="1">
+                                                <a:latin typeface="Cambria Math" panose="02040503050406030204" pitchFamily="18" charset="0"/>
+                                              </a:rPr>
+                                              <m:t>𝑑</m:t>
+                                            </m:r>
+                                          </m:e>
+                                          <m:sup>
+                                            <m:r>
+                                              <a:rPr lang="fr-FR" i="1">
+                                                <a:latin typeface="Cambria Math" panose="02040503050406030204" pitchFamily="18" charset="0"/>
+                                              </a:rPr>
+                                              <m:t>2</m:t>
+                                            </m:r>
+                                          </m:sup>
+                                        </m:sSup>
+                                        <m:r>
+                                          <a:rPr lang="fr-FR" i="1">
+                                            <a:latin typeface="Cambria Math" panose="02040503050406030204" pitchFamily="18" charset="0"/>
+                                          </a:rPr>
+                                          <m:t>+</m:t>
+                                        </m:r>
+                                        <m:sSup>
+                                          <m:sSupPr>
+                                            <m:ctrlPr>
+                                              <a:rPr lang="fr-FR" i="1">
+                                                <a:latin typeface="Cambria Math" panose="02040503050406030204" pitchFamily="18" charset="0"/>
+                                              </a:rPr>
+                                            </m:ctrlPr>
+                                          </m:sSupPr>
+                                          <m:e>
+                                            <m:d>
+                                              <m:dPr>
+                                                <m:ctrlPr>
+                                                  <a:rPr lang="fr-FR" i="1">
+                                                    <a:latin typeface="Cambria Math" panose="02040503050406030204" pitchFamily="18" charset="0"/>
+                                                  </a:rPr>
+                                                </m:ctrlPr>
+                                              </m:dPr>
+                                              <m:e>
+                                                <m:r>
+                                                  <a:rPr lang="fr-FR" i="1">
+                                                    <a:latin typeface="Cambria Math" panose="02040503050406030204" pitchFamily="18" charset="0"/>
+                                                  </a:rPr>
+                                                  <m:t>𝑏</m:t>
+                                                </m:r>
+                                                <m:r>
+                                                  <a:rPr lang="fr-FR" i="1">
+                                                    <a:latin typeface="Cambria Math" panose="02040503050406030204" pitchFamily="18" charset="0"/>
+                                                  </a:rPr>
+                                                  <m:t>+</m:t>
+                                                </m:r>
+                                                <m:r>
+                                                  <a:rPr lang="fr-FR" i="1">
+                                                    <a:latin typeface="Cambria Math" panose="02040503050406030204" pitchFamily="18" charset="0"/>
+                                                  </a:rPr>
+                                                  <m:t>𝑐</m:t>
+                                                </m:r>
+                                              </m:e>
+                                            </m:d>
+                                          </m:e>
+                                          <m:sup>
+                                            <m:r>
+                                              <a:rPr lang="fr-FR" i="1">
+                                                <a:latin typeface="Cambria Math" panose="02040503050406030204" pitchFamily="18" charset="0"/>
+                                              </a:rPr>
+                                              <m:t>2</m:t>
+                                            </m:r>
+                                          </m:sup>
+                                        </m:sSup>
+                                      </m:e>
+                                    </m:rad>
+                                    <m:r>
+                                      <m:rPr>
+                                        <m:nor/>
+                                      </m:rPr>
+                                      <a:rPr lang="fr-FR" i="1" dirty="0">
+                                        <a:latin typeface="Cambria Math" panose="02040503050406030204" pitchFamily="18" charset="0"/>
+                                      </a:rPr>
+                                      <m:t> </m:t>
+                                    </m:r>
+                                    <m:r>
+                                      <a:rPr lang="fr-FR" i="1">
+                                        <a:latin typeface="Cambria Math" panose="02040503050406030204" pitchFamily="18" charset="0"/>
+                                      </a:rPr>
+                                      <m:t>+</m:t>
+                                    </m:r>
+                                    <m:r>
+                                      <a:rPr lang="fr-FR" i="1">
+                                        <a:latin typeface="Cambria Math" panose="02040503050406030204" pitchFamily="18" charset="0"/>
+                                      </a:rPr>
+                                      <m:t>𝑝</m:t>
+                                    </m:r>
+                                    <m:r>
+                                      <a:rPr lang="fr-FR" i="1">
+                                        <a:latin typeface="Cambria Math" panose="02040503050406030204" pitchFamily="18" charset="0"/>
+                                      </a:rPr>
+                                      <m:t>×</m:t>
+                                    </m:r>
+                                    <m:f>
+                                      <m:fPr>
+                                        <m:ctrlPr>
+                                          <a:rPr lang="fr-FR" i="1">
+                                            <a:latin typeface="Cambria Math" panose="02040503050406030204" pitchFamily="18" charset="0"/>
+                                          </a:rPr>
+                                        </m:ctrlPr>
+                                      </m:fPr>
+                                      <m:num>
+                                        <m:r>
+                                          <a:rPr lang="fr-FR" i="1">
+                                            <a:latin typeface="Cambria Math" panose="02040503050406030204" pitchFamily="18" charset="0"/>
+                                          </a:rPr>
+                                          <m:t>𝛾</m:t>
+                                        </m:r>
+                                      </m:num>
+                                      <m:den>
+                                        <m:r>
+                                          <a:rPr lang="fr-FR" i="1">
+                                            <a:latin typeface="Cambria Math" panose="02040503050406030204" pitchFamily="18" charset="0"/>
+                                          </a:rPr>
+                                          <m:t>2</m:t>
+                                        </m:r>
+                                        <m:r>
+                                          <a:rPr lang="fr-FR" i="1">
+                                            <a:latin typeface="Cambria Math" panose="02040503050406030204" pitchFamily="18" charset="0"/>
+                                          </a:rPr>
+                                          <m:t>𝜋</m:t>
+                                        </m:r>
+                                      </m:den>
+                                    </m:f>
+                                  </m:e>
+                                </m:d>
+                                <m:r>
+                                  <a:rPr lang="fr-FR" i="1">
+                                    <a:latin typeface="Cambria Math" panose="02040503050406030204" pitchFamily="18" charset="0"/>
+                                  </a:rPr>
+                                  <m:t>−</m:t>
+                                </m:r>
+                                <m:sSup>
+                                  <m:sSupPr>
+                                    <m:ctrlPr>
+                                      <a:rPr lang="fr-FR" i="1">
+                                        <a:latin typeface="Cambria Math" panose="02040503050406030204" pitchFamily="18" charset="0"/>
+                                      </a:rPr>
+                                    </m:ctrlPr>
+                                  </m:sSupPr>
+                                  <m:e>
+                                    <m:r>
+                                      <a:rPr lang="fr-FR" i="1">
+                                        <a:latin typeface="Cambria Math" panose="02040503050406030204" pitchFamily="18" charset="0"/>
+                                      </a:rPr>
+                                      <m:t>𝑎</m:t>
+                                    </m:r>
+                                  </m:e>
+                                  <m:sup>
+                                    <m:r>
+                                      <a:rPr lang="fr-FR" i="1">
+                                        <a:latin typeface="Cambria Math" panose="02040503050406030204" pitchFamily="18" charset="0"/>
+                                      </a:rPr>
+                                      <m:t>2</m:t>
+                                    </m:r>
+                                  </m:sup>
+                                </m:sSup>
+                                <m:r>
+                                  <a:rPr lang="fr-FR" i="1">
+                                    <a:latin typeface="Cambria Math" panose="02040503050406030204" pitchFamily="18" charset="0"/>
+                                  </a:rPr>
+                                  <m:t>−</m:t>
+                                </m:r>
+                                <m:sSup>
+                                  <m:sSupPr>
+                                    <m:ctrlPr>
+                                      <a:rPr lang="fr-FR" i="1">
+                                        <a:latin typeface="Cambria Math" panose="02040503050406030204" pitchFamily="18" charset="0"/>
+                                      </a:rPr>
+                                    </m:ctrlPr>
+                                  </m:sSupPr>
+                                  <m:e>
+                                    <m:r>
+                                      <a:rPr lang="fr-FR" i="1">
+                                        <a:latin typeface="Cambria Math" panose="02040503050406030204" pitchFamily="18" charset="0"/>
+                                      </a:rPr>
+                                      <m:t>𝑏</m:t>
+                                    </m:r>
+                                  </m:e>
+                                  <m:sup>
+                                    <m:r>
+                                      <a:rPr lang="fr-FR" i="1">
+                                        <a:latin typeface="Cambria Math" panose="02040503050406030204" pitchFamily="18" charset="0"/>
+                                      </a:rPr>
+                                      <m:t>2</m:t>
+                                    </m:r>
+                                  </m:sup>
+                                </m:sSup>
+                              </m:num>
+                              <m:den>
+                                <m:r>
+                                  <a:rPr lang="fr-FR" i="1">
+                                    <a:latin typeface="Cambria Math" panose="02040503050406030204" pitchFamily="18" charset="0"/>
+                                  </a:rPr>
+                                  <m:t>2</m:t>
+                                </m:r>
+                                <m:r>
+                                  <a:rPr lang="fr-FR" i="1">
+                                    <a:latin typeface="Cambria Math" panose="02040503050406030204" pitchFamily="18" charset="0"/>
+                                  </a:rPr>
+                                  <m:t>𝑎𝑏</m:t>
+                                </m:r>
+                              </m:den>
+                            </m:f>
+                          </m:e>
+                        </m:d>
+                      </m:e>
+                    </m:func>
+                    <m:r>
+                      <a:rPr lang="fr-FR" i="1">
+                        <a:latin typeface="Cambria Math" panose="02040503050406030204" pitchFamily="18" charset="0"/>
+                      </a:rPr>
+                      <m:t>−</m:t>
+                    </m:r>
+                    <m:func>
+                      <m:funcPr>
+                        <m:ctrlPr>
+                          <a:rPr lang="fr-FR" i="1">
+                            <a:latin typeface="Cambria Math" panose="02040503050406030204" pitchFamily="18" charset="0"/>
+                          </a:rPr>
+                        </m:ctrlPr>
+                      </m:funcPr>
+                      <m:fName>
+                        <m:sSup>
+                          <m:sSupPr>
+                            <m:ctrlPr>
+                              <a:rPr lang="fr-FR" i="1">
+                                <a:latin typeface="Cambria Math" panose="02040503050406030204" pitchFamily="18" charset="0"/>
+                              </a:rPr>
+                            </m:ctrlPr>
+                          </m:sSupPr>
+                          <m:e>
+                            <m:r>
+                              <m:rPr>
+                                <m:sty m:val="p"/>
+                              </m:rPr>
+                              <a:rPr lang="fr-FR">
+                                <a:latin typeface="Cambria Math" panose="02040503050406030204" pitchFamily="18" charset="0"/>
+                              </a:rPr>
+                              <m:t>tan</m:t>
+                            </m:r>
+                          </m:e>
+                          <m:sup>
+                            <m:r>
+                              <a:rPr lang="fr-FR" i="1">
+                                <a:latin typeface="Cambria Math" panose="02040503050406030204" pitchFamily="18" charset="0"/>
+                              </a:rPr>
+                              <m:t>−1</m:t>
+                            </m:r>
+                          </m:sup>
+                        </m:sSup>
+                      </m:fName>
+                      <m:e>
+                        <m:d>
+                          <m:dPr>
+                            <m:ctrlPr>
+                              <a:rPr lang="fr-FR" i="1">
+                                <a:latin typeface="Cambria Math" panose="02040503050406030204" pitchFamily="18" charset="0"/>
+                              </a:rPr>
+                            </m:ctrlPr>
+                          </m:dPr>
+                          <m:e>
+                            <m:f>
+                              <m:fPr>
+                                <m:ctrlPr>
+                                  <a:rPr lang="fr-FR" i="1">
+                                    <a:latin typeface="Cambria Math" panose="02040503050406030204" pitchFamily="18" charset="0"/>
+                                  </a:rPr>
+                                </m:ctrlPr>
+                              </m:fPr>
+                              <m:num>
+                                <m:r>
+                                  <a:rPr lang="fr-FR" i="1">
+                                    <a:latin typeface="Cambria Math" panose="02040503050406030204" pitchFamily="18" charset="0"/>
+                                  </a:rPr>
+                                  <m:t>𝑑</m:t>
+                                </m:r>
+                              </m:num>
+                              <m:den>
+                                <m:r>
+                                  <a:rPr lang="fr-FR" i="1">
+                                    <a:latin typeface="Cambria Math" panose="02040503050406030204" pitchFamily="18" charset="0"/>
+                                  </a:rPr>
+                                  <m:t>𝑐</m:t>
+                                </m:r>
+                              </m:den>
+                            </m:f>
+                          </m:e>
+                        </m:d>
+                      </m:e>
+                    </m:func>
+                  </m:oMath>
+                </a14:m>
+                <a:endParaRPr lang="fr-FR" dirty="0"/>
+              </a:p>
             </p:txBody>
           </p:sp>
         </mc:Choice>
-        <mc:Fallback xmlns="">
+        <mc:Fallback>
           <p:sp>
             <p:nvSpPr>
               <p:cNvPr id="3" name="Espace réservé du contenu 2">
@@ -43504,7 +44986,7 @@
               <a:blipFill>
                 <a:blip r:embed="rId3"/>
                 <a:stretch>
-                  <a:fillRect l="-1248"/>
+                  <a:fillRect l="-988"/>
                 </a:stretch>
               </a:blipFill>
             </p:spPr>
@@ -43545,8 +45027,8 @@
         </p:blipFill>
         <p:spPr>
           <a:xfrm>
-            <a:off x="8025976" y="-502621"/>
-            <a:ext cx="4336094" cy="3394296"/>
+            <a:off x="7695744" y="-491192"/>
+            <a:ext cx="4803486" cy="3760171"/>
           </a:xfrm>
           <a:prstGeom prst="rect">
             <a:avLst/>
@@ -43575,7 +45057,7 @@
         </p:blipFill>
         <p:spPr>
           <a:xfrm>
-            <a:off x="6612467" y="109441"/>
+            <a:off x="6269567" y="86581"/>
             <a:ext cx="1245430" cy="3016612"/>
           </a:xfrm>
           <a:prstGeom prst="rect">

--- a/11_MaxPID/11_MaxPID_Corrige.pptx
+++ b/11_MaxPID/11_MaxPID_Corrige.pptx
@@ -13,18 +13,19 @@
     <p:sldId id="269" r:id="rId7"/>
     <p:sldId id="286" r:id="rId8"/>
     <p:sldId id="287" r:id="rId9"/>
-    <p:sldId id="284" r:id="rId10"/>
-    <p:sldId id="272" r:id="rId11"/>
-    <p:sldId id="271" r:id="rId12"/>
-    <p:sldId id="280" r:id="rId13"/>
-    <p:sldId id="274" r:id="rId14"/>
-    <p:sldId id="275" r:id="rId15"/>
-    <p:sldId id="281" r:id="rId16"/>
-    <p:sldId id="278" r:id="rId17"/>
-    <p:sldId id="276" r:id="rId18"/>
-    <p:sldId id="277" r:id="rId19"/>
-    <p:sldId id="282" r:id="rId20"/>
-    <p:sldId id="283" r:id="rId21"/>
+    <p:sldId id="288" r:id="rId10"/>
+    <p:sldId id="284" r:id="rId11"/>
+    <p:sldId id="272" r:id="rId12"/>
+    <p:sldId id="271" r:id="rId13"/>
+    <p:sldId id="280" r:id="rId14"/>
+    <p:sldId id="274" r:id="rId15"/>
+    <p:sldId id="275" r:id="rId16"/>
+    <p:sldId id="281" r:id="rId17"/>
+    <p:sldId id="278" r:id="rId18"/>
+    <p:sldId id="276" r:id="rId19"/>
+    <p:sldId id="277" r:id="rId20"/>
+    <p:sldId id="282" r:id="rId21"/>
+    <p:sldId id="283" r:id="rId22"/>
   </p:sldIdLst>
   <p:sldSz cx="12192000" cy="6858000"/>
   <p:notesSz cx="6858000" cy="9144000"/>
@@ -385,7 +386,7 @@
           <a:p>
             <a:fld id="{D7F135F6-2A09-4FDD-9ECA-096E230CA0FA}" type="datetimeFigureOut">
               <a:rPr lang="fr-FR" smtClean="0"/>
-              <a:t>27/02/2026</a:t>
+              <a:t>06/03/2026</a:t>
             </a:fld>
             <a:endParaRPr lang="fr-FR"/>
           </a:p>
@@ -590,7 +591,7 @@
           <a:p>
             <a:fld id="{D7F135F6-2A09-4FDD-9ECA-096E230CA0FA}" type="datetimeFigureOut">
               <a:rPr lang="fr-FR" smtClean="0"/>
-              <a:t>27/02/2026</a:t>
+              <a:t>06/03/2026</a:t>
             </a:fld>
             <a:endParaRPr lang="fr-FR"/>
           </a:p>
@@ -846,7 +847,7 @@
           <a:p>
             <a:fld id="{D7F135F6-2A09-4FDD-9ECA-096E230CA0FA}" type="datetimeFigureOut">
               <a:rPr lang="fr-FR" smtClean="0"/>
-              <a:t>27/02/2026</a:t>
+              <a:t>06/03/2026</a:t>
             </a:fld>
             <a:endParaRPr lang="fr-FR"/>
           </a:p>
@@ -1052,7 +1053,7 @@
           <a:p>
             <a:fld id="{D7F135F6-2A09-4FDD-9ECA-096E230CA0FA}" type="datetimeFigureOut">
               <a:rPr lang="fr-FR" smtClean="0"/>
-              <a:t>27/02/2026</a:t>
+              <a:t>06/03/2026</a:t>
             </a:fld>
             <a:endParaRPr lang="fr-FR"/>
           </a:p>
@@ -1428,7 +1429,7 @@
           <a:p>
             <a:fld id="{D7F135F6-2A09-4FDD-9ECA-096E230CA0FA}" type="datetimeFigureOut">
               <a:rPr lang="fr-FR" smtClean="0"/>
-              <a:t>27/02/2026</a:t>
+              <a:t>06/03/2026</a:t>
             </a:fld>
             <a:endParaRPr lang="fr-FR"/>
           </a:p>
@@ -1703,7 +1704,7 @@
           <a:p>
             <a:fld id="{D7F135F6-2A09-4FDD-9ECA-096E230CA0FA}" type="datetimeFigureOut">
               <a:rPr lang="fr-FR" smtClean="0"/>
-              <a:t>27/02/2026</a:t>
+              <a:t>06/03/2026</a:t>
             </a:fld>
             <a:endParaRPr lang="fr-FR"/>
           </a:p>
@@ -2082,7 +2083,7 @@
           <a:p>
             <a:fld id="{D7F135F6-2A09-4FDD-9ECA-096E230CA0FA}" type="datetimeFigureOut">
               <a:rPr lang="fr-FR" smtClean="0"/>
-              <a:t>27/02/2026</a:t>
+              <a:t>06/03/2026</a:t>
             </a:fld>
             <a:endParaRPr lang="fr-FR"/>
           </a:p>
@@ -2200,7 +2201,7 @@
           <a:p>
             <a:fld id="{D7F135F6-2A09-4FDD-9ECA-096E230CA0FA}" type="datetimeFigureOut">
               <a:rPr lang="fr-FR" smtClean="0"/>
-              <a:t>27/02/2026</a:t>
+              <a:t>06/03/2026</a:t>
             </a:fld>
             <a:endParaRPr lang="fr-FR"/>
           </a:p>
@@ -2374,7 +2375,7 @@
           <a:p>
             <a:fld id="{D7F135F6-2A09-4FDD-9ECA-096E230CA0FA}" type="datetimeFigureOut">
               <a:rPr lang="fr-FR" smtClean="0"/>
-              <a:t>27/02/2026</a:t>
+              <a:t>06/03/2026</a:t>
             </a:fld>
             <a:endParaRPr lang="fr-FR"/>
           </a:p>
@@ -2731,7 +2732,7 @@
           <a:p>
             <a:fld id="{D7F135F6-2A09-4FDD-9ECA-096E230CA0FA}" type="datetimeFigureOut">
               <a:rPr lang="fr-FR" smtClean="0"/>
-              <a:t>27/02/2026</a:t>
+              <a:t>06/03/2026</a:t>
             </a:fld>
             <a:endParaRPr lang="fr-FR"/>
           </a:p>
@@ -3116,7 +3117,7 @@
           <a:p>
             <a:fld id="{D7F135F6-2A09-4FDD-9ECA-096E230CA0FA}" type="datetimeFigureOut">
               <a:rPr lang="fr-FR" smtClean="0"/>
-              <a:t>27/02/2026</a:t>
+              <a:t>06/03/2026</a:t>
             </a:fld>
             <a:endParaRPr lang="fr-FR"/>
           </a:p>
@@ -3420,7 +3421,7 @@
           <a:p>
             <a:fld id="{D7F135F6-2A09-4FDD-9ECA-096E230CA0FA}" type="datetimeFigureOut">
               <a:rPr lang="fr-FR" smtClean="0"/>
-              <a:t>27/02/2026</a:t>
+              <a:t>06/03/2026</a:t>
             </a:fld>
             <a:endParaRPr lang="fr-FR" dirty="0"/>
           </a:p>
@@ -4042,6 +4043,104 @@
   <p:cSld>
     <p:spTree>
       <p:nvGrpSpPr>
+        <p:cNvPr id="1" name="">
+          <a:extLst>
+            <a:ext uri="{FF2B5EF4-FFF2-40B4-BE49-F238E27FC236}">
+              <a16:creationId xmlns:a16="http://schemas.microsoft.com/office/drawing/2014/main" id="{609890C1-FE7C-69F3-01BD-1A405BB59B34}"/>
+            </a:ext>
+          </a:extLst>
+        </p:cNvPr>
+        <p:cNvGrpSpPr/>
+        <p:nvPr/>
+      </p:nvGrpSpPr>
+      <p:grpSpPr>
+        <a:xfrm>
+          <a:off x="0" y="0"/>
+          <a:ext cx="0" cy="0"/>
+          <a:chOff x="0" y="0"/>
+          <a:chExt cx="0" cy="0"/>
+        </a:xfrm>
+      </p:grpSpPr>
+      <p:sp>
+        <p:nvSpPr>
+          <p:cNvPr id="4" name="Titre 3">
+            <a:extLst>
+              <a:ext uri="{FF2B5EF4-FFF2-40B4-BE49-F238E27FC236}">
+                <a16:creationId xmlns:a16="http://schemas.microsoft.com/office/drawing/2014/main" id="{06F0FB32-B016-FED2-32DB-B91BA7AA05FE}"/>
+              </a:ext>
+            </a:extLst>
+          </p:cNvPr>
+          <p:cNvSpPr>
+            <a:spLocks noGrp="1"/>
+          </p:cNvSpPr>
+          <p:nvPr>
+            <p:ph type="title"/>
+          </p:nvPr>
+        </p:nvSpPr>
+        <p:spPr/>
+        <p:txBody>
+          <a:bodyPr>
+            <a:normAutofit fontScale="90000"/>
+          </a:bodyPr>
+          <a:lstStyle/>
+          <a:p>
+            <a:r>
+              <a:rPr lang="fr-FR" dirty="0"/>
+              <a:t>07</a:t>
+            </a:r>
+            <a:br>
+              <a:rPr lang="fr-FR" dirty="0"/>
+            </a:br>
+            <a:r>
+              <a:rPr lang="fr-FR" dirty="0"/>
+              <a:t>Modélisation composants ou phénomènes</a:t>
+            </a:r>
+          </a:p>
+        </p:txBody>
+      </p:sp>
+      <p:sp>
+        <p:nvSpPr>
+          <p:cNvPr id="5" name="Espace réservé du texte 4">
+            <a:extLst>
+              <a:ext uri="{FF2B5EF4-FFF2-40B4-BE49-F238E27FC236}">
+                <a16:creationId xmlns:a16="http://schemas.microsoft.com/office/drawing/2014/main" id="{C8C8992F-8C34-F226-1E01-2A59D755ED7F}"/>
+              </a:ext>
+            </a:extLst>
+          </p:cNvPr>
+          <p:cNvSpPr>
+            <a:spLocks noGrp="1"/>
+          </p:cNvSpPr>
+          <p:nvPr>
+            <p:ph type="body" idx="1"/>
+          </p:nvPr>
+        </p:nvSpPr>
+        <p:spPr/>
+        <p:txBody>
+          <a:bodyPr/>
+          <a:lstStyle/>
+          <a:p>
+            <a:endParaRPr lang="fr-FR"/>
+          </a:p>
+        </p:txBody>
+      </p:sp>
+    </p:spTree>
+    <p:extLst>
+      <p:ext uri="{BB962C8B-B14F-4D97-AF65-F5344CB8AC3E}">
+        <p14:creationId xmlns:p14="http://schemas.microsoft.com/office/powerpoint/2010/main" val="106158342"/>
+      </p:ext>
+    </p:extLst>
+  </p:cSld>
+  <p:clrMapOvr>
+    <a:masterClrMapping/>
+  </p:clrMapOvr>
+</p:sld>
+</file>
+
+<file path=ppt/slides/slide11.xml><?xml version="1.0" encoding="utf-8"?>
+<p:sld xmlns:a="http://schemas.openxmlformats.org/drawingml/2006/main" xmlns:r="http://schemas.openxmlformats.org/officeDocument/2006/relationships" xmlns:p="http://schemas.openxmlformats.org/presentationml/2006/main">
+  <p:cSld>
+    <p:spTree>
+      <p:nvGrpSpPr>
         <p:cNvPr id="1" name=""/>
         <p:cNvGrpSpPr/>
         <p:nvPr/>
@@ -4129,7 +4228,7 @@
 </p:sld>
 </file>
 
-<file path=ppt/slides/slide11.xml><?xml version="1.0" encoding="utf-8"?>
+<file path=ppt/slides/slide12.xml><?xml version="1.0" encoding="utf-8"?>
 <p:sld xmlns:a="http://schemas.openxmlformats.org/drawingml/2006/main" xmlns:r="http://schemas.openxmlformats.org/officeDocument/2006/relationships" xmlns:p="http://schemas.openxmlformats.org/presentationml/2006/main">
   <p:cSld>
     <p:spTree>
@@ -5499,7 +5598,7 @@
 </p:sld>
 </file>
 
-<file path=ppt/slides/slide12.xml><?xml version="1.0" encoding="utf-8"?>
+<file path=ppt/slides/slide13.xml><?xml version="1.0" encoding="utf-8"?>
 <p:sld xmlns:a="http://schemas.openxmlformats.org/drawingml/2006/main" xmlns:r="http://schemas.openxmlformats.org/officeDocument/2006/relationships" xmlns:p="http://schemas.openxmlformats.org/presentationml/2006/main">
   <p:cSld>
     <p:spTree>
@@ -15180,7 +15279,7 @@
 </p:sld>
 </file>
 
-<file path=ppt/slides/slide13.xml><?xml version="1.0" encoding="utf-8"?>
+<file path=ppt/slides/slide14.xml><?xml version="1.0" encoding="utf-8"?>
 <p:sld xmlns:a="http://schemas.openxmlformats.org/drawingml/2006/main" xmlns:r="http://schemas.openxmlformats.org/officeDocument/2006/relationships" xmlns:p="http://schemas.openxmlformats.org/presentationml/2006/main">
   <p:cSld>
     <p:spTree>
@@ -15655,7 +15754,7 @@
 </p:sld>
 </file>
 
-<file path=ppt/slides/slide14.xml><?xml version="1.0" encoding="utf-8"?>
+<file path=ppt/slides/slide15.xml><?xml version="1.0" encoding="utf-8"?>
 <p:sld xmlns:a="http://schemas.openxmlformats.org/drawingml/2006/main" xmlns:r="http://schemas.openxmlformats.org/officeDocument/2006/relationships" xmlns:p="http://schemas.openxmlformats.org/presentationml/2006/main">
   <p:cSld>
     <p:spTree>
@@ -19713,7 +19812,7 @@
 </p:sld>
 </file>
 
-<file path=ppt/slides/slide15.xml><?xml version="1.0" encoding="utf-8"?>
+<file path=ppt/slides/slide16.xml><?xml version="1.0" encoding="utf-8"?>
 <p:sld xmlns:a="http://schemas.openxmlformats.org/drawingml/2006/main" xmlns:r="http://schemas.openxmlformats.org/officeDocument/2006/relationships" xmlns:p="http://schemas.openxmlformats.org/presentationml/2006/main">
   <p:cSld>
     <p:spTree>
@@ -19862,7 +19961,7 @@
 </p:sld>
 </file>
 
-<file path=ppt/slides/slide16.xml><?xml version="1.0" encoding="utf-8"?>
+<file path=ppt/slides/slide17.xml><?xml version="1.0" encoding="utf-8"?>
 <p:sld xmlns:a="http://schemas.openxmlformats.org/drawingml/2006/main" xmlns:r="http://schemas.openxmlformats.org/officeDocument/2006/relationships" xmlns:p="http://schemas.openxmlformats.org/presentationml/2006/main">
   <p:cSld>
     <p:spTree>
@@ -22618,7 +22717,7 @@
 </p:sld>
 </file>
 
-<file path=ppt/slides/slide17.xml><?xml version="1.0" encoding="utf-8"?>
+<file path=ppt/slides/slide18.xml><?xml version="1.0" encoding="utf-8"?>
 <p:sld xmlns:a="http://schemas.openxmlformats.org/drawingml/2006/main" xmlns:r="http://schemas.openxmlformats.org/officeDocument/2006/relationships" xmlns:p="http://schemas.openxmlformats.org/presentationml/2006/main">
   <p:cSld>
     <p:spTree>
@@ -23025,7 +23124,7 @@
 </p:sld>
 </file>
 
-<file path=ppt/slides/slide18.xml><?xml version="1.0" encoding="utf-8"?>
+<file path=ppt/slides/slide19.xml><?xml version="1.0" encoding="utf-8"?>
 <p:sld xmlns:a="http://schemas.openxmlformats.org/drawingml/2006/main" xmlns:r="http://schemas.openxmlformats.org/officeDocument/2006/relationships" xmlns:p="http://schemas.openxmlformats.org/presentationml/2006/main">
   <p:cSld>
     <p:spTree>
@@ -23367,7 +23466,87 @@
 </p:sld>
 </file>
 
-<file path=ppt/slides/slide19.xml><?xml version="1.0" encoding="utf-8"?>
+<file path=ppt/slides/slide2.xml><?xml version="1.0" encoding="utf-8"?>
+<p:sld xmlns:a="http://schemas.openxmlformats.org/drawingml/2006/main" xmlns:r="http://schemas.openxmlformats.org/officeDocument/2006/relationships" xmlns:p="http://schemas.openxmlformats.org/presentationml/2006/main">
+  <p:cSld>
+    <p:spTree>
+      <p:nvGrpSpPr>
+        <p:cNvPr id="1" name=""/>
+        <p:cNvGrpSpPr/>
+        <p:nvPr/>
+      </p:nvGrpSpPr>
+      <p:grpSpPr>
+        <a:xfrm>
+          <a:off x="0" y="0"/>
+          <a:ext cx="0" cy="0"/>
+          <a:chOff x="0" y="0"/>
+          <a:chExt cx="0" cy="0"/>
+        </a:xfrm>
+      </p:grpSpPr>
+      <p:sp>
+        <p:nvSpPr>
+          <p:cNvPr id="2" name="Titre 1">
+            <a:extLst>
+              <a:ext uri="{FF2B5EF4-FFF2-40B4-BE49-F238E27FC236}">
+                <a16:creationId xmlns:a16="http://schemas.microsoft.com/office/drawing/2014/main" id="{2B23CFB6-C96F-2738-656C-799A569A57DB}"/>
+              </a:ext>
+            </a:extLst>
+          </p:cNvPr>
+          <p:cNvSpPr>
+            <a:spLocks noGrp="1"/>
+          </p:cNvSpPr>
+          <p:nvPr>
+            <p:ph type="title"/>
+          </p:nvPr>
+        </p:nvSpPr>
+        <p:spPr/>
+        <p:txBody>
+          <a:bodyPr/>
+          <a:lstStyle/>
+          <a:p>
+            <a:endParaRPr lang="fr-FR"/>
+          </a:p>
+        </p:txBody>
+      </p:sp>
+      <p:sp>
+        <p:nvSpPr>
+          <p:cNvPr id="3" name="Espace réservé du contenu 2">
+            <a:extLst>
+              <a:ext uri="{FF2B5EF4-FFF2-40B4-BE49-F238E27FC236}">
+                <a16:creationId xmlns:a16="http://schemas.microsoft.com/office/drawing/2014/main" id="{63A0F49C-2000-CFFA-4CC2-9D86BC1329D8}"/>
+              </a:ext>
+            </a:extLst>
+          </p:cNvPr>
+          <p:cNvSpPr>
+            <a:spLocks noGrp="1"/>
+          </p:cNvSpPr>
+          <p:nvPr>
+            <p:ph idx="1"/>
+          </p:nvPr>
+        </p:nvSpPr>
+        <p:spPr/>
+        <p:txBody>
+          <a:bodyPr/>
+          <a:lstStyle/>
+          <a:p>
+            <a:endParaRPr lang="fr-FR" dirty="0"/>
+          </a:p>
+        </p:txBody>
+      </p:sp>
+    </p:spTree>
+    <p:extLst>
+      <p:ext uri="{BB962C8B-B14F-4D97-AF65-F5344CB8AC3E}">
+        <p14:creationId xmlns:p14="http://schemas.microsoft.com/office/powerpoint/2010/main" val="696684578"/>
+      </p:ext>
+    </p:extLst>
+  </p:cSld>
+  <p:clrMapOvr>
+    <a:masterClrMapping/>
+  </p:clrMapOvr>
+</p:sld>
+</file>
+
+<file path=ppt/slides/slide20.xml><?xml version="1.0" encoding="utf-8"?>
 <p:sld xmlns:a="http://schemas.openxmlformats.org/drawingml/2006/main" xmlns:r="http://schemas.openxmlformats.org/officeDocument/2006/relationships" xmlns:p="http://schemas.openxmlformats.org/presentationml/2006/main">
   <p:cSld>
     <p:spTree>
@@ -32535,87 +32714,7 @@
 </p:sld>
 </file>
 
-<file path=ppt/slides/slide2.xml><?xml version="1.0" encoding="utf-8"?>
-<p:sld xmlns:a="http://schemas.openxmlformats.org/drawingml/2006/main" xmlns:r="http://schemas.openxmlformats.org/officeDocument/2006/relationships" xmlns:p="http://schemas.openxmlformats.org/presentationml/2006/main">
-  <p:cSld>
-    <p:spTree>
-      <p:nvGrpSpPr>
-        <p:cNvPr id="1" name=""/>
-        <p:cNvGrpSpPr/>
-        <p:nvPr/>
-      </p:nvGrpSpPr>
-      <p:grpSpPr>
-        <a:xfrm>
-          <a:off x="0" y="0"/>
-          <a:ext cx="0" cy="0"/>
-          <a:chOff x="0" y="0"/>
-          <a:chExt cx="0" cy="0"/>
-        </a:xfrm>
-      </p:grpSpPr>
-      <p:sp>
-        <p:nvSpPr>
-          <p:cNvPr id="2" name="Titre 1">
-            <a:extLst>
-              <a:ext uri="{FF2B5EF4-FFF2-40B4-BE49-F238E27FC236}">
-                <a16:creationId xmlns:a16="http://schemas.microsoft.com/office/drawing/2014/main" id="{2B23CFB6-C96F-2738-656C-799A569A57DB}"/>
-              </a:ext>
-            </a:extLst>
-          </p:cNvPr>
-          <p:cNvSpPr>
-            <a:spLocks noGrp="1"/>
-          </p:cNvSpPr>
-          <p:nvPr>
-            <p:ph type="title"/>
-          </p:nvPr>
-        </p:nvSpPr>
-        <p:spPr/>
-        <p:txBody>
-          <a:bodyPr/>
-          <a:lstStyle/>
-          <a:p>
-            <a:endParaRPr lang="fr-FR"/>
-          </a:p>
-        </p:txBody>
-      </p:sp>
-      <p:sp>
-        <p:nvSpPr>
-          <p:cNvPr id="3" name="Espace réservé du contenu 2">
-            <a:extLst>
-              <a:ext uri="{FF2B5EF4-FFF2-40B4-BE49-F238E27FC236}">
-                <a16:creationId xmlns:a16="http://schemas.microsoft.com/office/drawing/2014/main" id="{63A0F49C-2000-CFFA-4CC2-9D86BC1329D8}"/>
-              </a:ext>
-            </a:extLst>
-          </p:cNvPr>
-          <p:cNvSpPr>
-            <a:spLocks noGrp="1"/>
-          </p:cNvSpPr>
-          <p:nvPr>
-            <p:ph idx="1"/>
-          </p:nvPr>
-        </p:nvSpPr>
-        <p:spPr/>
-        <p:txBody>
-          <a:bodyPr/>
-          <a:lstStyle/>
-          <a:p>
-            <a:endParaRPr lang="fr-FR" dirty="0"/>
-          </a:p>
-        </p:txBody>
-      </p:sp>
-    </p:spTree>
-    <p:extLst>
-      <p:ext uri="{BB962C8B-B14F-4D97-AF65-F5344CB8AC3E}">
-        <p14:creationId xmlns:p14="http://schemas.microsoft.com/office/powerpoint/2010/main" val="696684578"/>
-      </p:ext>
-    </p:extLst>
-  </p:cSld>
-  <p:clrMapOvr>
-    <a:masterClrMapping/>
-  </p:clrMapOvr>
-</p:sld>
-</file>
-
-<file path=ppt/slides/slide20.xml><?xml version="1.0" encoding="utf-8"?>
+<file path=ppt/slides/slide21.xml><?xml version="1.0" encoding="utf-8"?>
 <p:sld xmlns:a="http://schemas.openxmlformats.org/drawingml/2006/main" xmlns:r="http://schemas.openxmlformats.org/officeDocument/2006/relationships" xmlns:p="http://schemas.openxmlformats.org/presentationml/2006/main">
   <p:cSld>
     <p:spTree>
@@ -34222,7 +34321,7 @@
         </p:blipFill>
         <p:spPr>
           <a:xfrm>
-            <a:off x="498044" y="3666221"/>
+            <a:off x="522168" y="3835914"/>
             <a:ext cx="360000" cy="360000"/>
           </a:xfrm>
           <a:prstGeom prst="rect">
@@ -35143,7 +35242,7 @@
             </p:nvSpPr>
             <p:spPr>
               <a:xfrm>
-                <a:off x="170158" y="4004272"/>
+                <a:off x="194282" y="4173965"/>
                 <a:ext cx="1161960" cy="276999"/>
               </a:xfrm>
               <a:prstGeom prst="rect">
@@ -35209,7 +35308,7 @@
             </p:nvSpPr>
             <p:spPr>
               <a:xfrm>
-                <a:off x="170158" y="4004272"/>
+                <a:off x="194282" y="4173965"/>
                 <a:ext cx="1161960" cy="276999"/>
               </a:xfrm>
               <a:prstGeom prst="rect">
@@ -37401,6 +37500,50 @@
           </p:spPr>
         </p:pic>
       </p:grpSp>
+      <p:cxnSp>
+        <p:nvCxnSpPr>
+          <p:cNvPr id="3" name="Connecteur droit avec flèche 2">
+            <a:extLst>
+              <a:ext uri="{FF2B5EF4-FFF2-40B4-BE49-F238E27FC236}">
+                <a16:creationId xmlns:a16="http://schemas.microsoft.com/office/drawing/2014/main" id="{4D32D995-368F-910A-03A5-33A843A7C607}"/>
+              </a:ext>
+            </a:extLst>
+          </p:cNvPr>
+          <p:cNvCxnSpPr>
+            <a:cxnSpLocks/>
+          </p:cNvCxnSpPr>
+          <p:nvPr/>
+        </p:nvCxnSpPr>
+        <p:spPr>
+          <a:xfrm flipV="1">
+            <a:off x="330698" y="3825761"/>
+            <a:ext cx="720000" cy="1536"/>
+          </a:xfrm>
+          <a:prstGeom prst="straightConnector1">
+            <a:avLst/>
+          </a:prstGeom>
+          <a:ln w="25400" cap="rnd">
+            <a:solidFill>
+              <a:srgbClr val="FDAD57"/>
+            </a:solidFill>
+            <a:tailEnd type="triangle" w="med" len="lg"/>
+          </a:ln>
+        </p:spPr>
+        <p:style>
+          <a:lnRef idx="1">
+            <a:schemeClr val="accent1"/>
+          </a:lnRef>
+          <a:fillRef idx="0">
+            <a:schemeClr val="accent1"/>
+          </a:fillRef>
+          <a:effectRef idx="0">
+            <a:schemeClr val="accent1"/>
+          </a:effectRef>
+          <a:fontRef idx="minor">
+            <a:schemeClr val="tx1"/>
+          </a:fontRef>
+        </p:style>
+      </p:cxnSp>
     </p:spTree>
     <p:extLst>
       <p:ext uri="{BB962C8B-B14F-4D97-AF65-F5344CB8AC3E}">
@@ -37539,30 +37682,6 @@
           </a:p>
         </p:txBody>
       </p:sp>
-      <p:pic>
-        <p:nvPicPr>
-          <p:cNvPr id="3" name="Image 2"/>
-          <p:cNvPicPr>
-            <a:picLocks noChangeAspect="1"/>
-          </p:cNvPicPr>
-          <p:nvPr/>
-        </p:nvPicPr>
-        <p:blipFill>
-          <a:blip r:embed="rId2"/>
-          <a:stretch>
-            <a:fillRect/>
-          </a:stretch>
-        </p:blipFill>
-        <p:spPr>
-          <a:xfrm>
-            <a:off x="368386" y="1564459"/>
-            <a:ext cx="11455228" cy="3751942"/>
-          </a:xfrm>
-          <a:prstGeom prst="rect">
-            <a:avLst/>
-          </a:prstGeom>
-        </p:spPr>
-      </p:pic>
     </p:spTree>
     <p:extLst>
       <p:ext uri="{BB962C8B-B14F-4D97-AF65-F5344CB8AC3E}">
@@ -37797,8 +37916,8 @@
           </p:sp>
         </mc:Fallback>
       </mc:AlternateContent>
-      <mc:AlternateContent xmlns:mc="http://schemas.openxmlformats.org/markup-compatibility/2006">
-        <mc:Choice xmlns:a14="http://schemas.microsoft.com/office/drawing/2010/main" Requires="a14">
+      <mc:AlternateContent xmlns:mc="http://schemas.openxmlformats.org/markup-compatibility/2006" xmlns:a14="http://schemas.microsoft.com/office/drawing/2010/main">
+        <mc:Choice Requires="a14">
           <p:sp>
             <p:nvSpPr>
               <p:cNvPr id="3" name="Espace réservé du contenu 2">
@@ -41338,7 +41457,7 @@
             </p:txBody>
           </p:sp>
         </mc:Choice>
-        <mc:Fallback>
+        <mc:Fallback xmlns="">
           <p:sp>
             <p:nvSpPr>
               <p:cNvPr id="3" name="Espace réservé du contenu 2">
@@ -41434,7 +41553,7 @@
         </p:blipFill>
         <p:spPr>
           <a:xfrm>
-            <a:off x="6612467" y="109441"/>
+            <a:off x="6780546" y="0"/>
             <a:ext cx="1245430" cy="3016612"/>
           </a:xfrm>
           <a:prstGeom prst="rect">
@@ -41590,8 +41709,8 @@
           </p:sp>
         </mc:Fallback>
       </mc:AlternateContent>
-      <mc:AlternateContent xmlns:mc="http://schemas.openxmlformats.org/markup-compatibility/2006">
-        <mc:Choice xmlns:a14="http://schemas.microsoft.com/office/drawing/2010/main" Requires="a14">
+      <mc:AlternateContent xmlns:mc="http://schemas.openxmlformats.org/markup-compatibility/2006" xmlns:a14="http://schemas.microsoft.com/office/drawing/2010/main">
+        <mc:Choice Requires="a14">
           <p:sp>
             <p:nvSpPr>
               <p:cNvPr id="3" name="Espace réservé du contenu 2">
@@ -44961,7 +45080,7 @@
             </p:txBody>
           </p:sp>
         </mc:Choice>
-        <mc:Fallback>
+        <mc:Fallback xmlns="">
           <p:sp>
             <p:nvSpPr>
               <p:cNvPr id="3" name="Espace réservé du contenu 2">
@@ -45083,13 +45202,7 @@
   <p:cSld>
     <p:spTree>
       <p:nvGrpSpPr>
-        <p:cNvPr id="1" name="">
-          <a:extLst>
-            <a:ext uri="{FF2B5EF4-FFF2-40B4-BE49-F238E27FC236}">
-              <a16:creationId xmlns:a16="http://schemas.microsoft.com/office/drawing/2014/main" id="{609890C1-FE7C-69F3-01BD-1A405BB59B34}"/>
-            </a:ext>
-          </a:extLst>
-        </p:cNvPr>
+        <p:cNvPr id="1" name=""/>
         <p:cNvGrpSpPr/>
         <p:nvPr/>
       </p:nvGrpSpPr>
@@ -45103,10 +45216,10 @@
       </p:grpSpPr>
       <p:sp>
         <p:nvSpPr>
-          <p:cNvPr id="4" name="Titre 3">
+          <p:cNvPr id="2" name="Titre 1">
             <a:extLst>
               <a:ext uri="{FF2B5EF4-FFF2-40B4-BE49-F238E27FC236}">
-                <a16:creationId xmlns:a16="http://schemas.microsoft.com/office/drawing/2014/main" id="{06F0FB32-B016-FED2-32DB-B91BA7AA05FE}"/>
+                <a16:creationId xmlns:a16="http://schemas.microsoft.com/office/drawing/2014/main" id="{C4EAD561-E397-48A3-8A25-608BAFD52691}"/>
               </a:ext>
             </a:extLst>
           </p:cNvPr>
@@ -45119,31 +45232,22 @@
         </p:nvSpPr>
         <p:spPr/>
         <p:txBody>
-          <a:bodyPr>
-            <a:normAutofit fontScale="90000"/>
-          </a:bodyPr>
+          <a:bodyPr/>
           <a:lstStyle/>
           <a:p>
             <a:r>
               <a:rPr lang="fr-FR" dirty="0"/>
-              <a:t>07</a:t>
-            </a:r>
-            <a:br>
-              <a:rPr lang="fr-FR" dirty="0"/>
-            </a:br>
-            <a:r>
-              <a:rPr lang="fr-FR" dirty="0"/>
-              <a:t>Modélisation composants ou phénomènes</a:t>
+              <a:t>Tracer les courbes</a:t>
             </a:r>
           </a:p>
         </p:txBody>
       </p:sp>
       <p:sp>
         <p:nvSpPr>
-          <p:cNvPr id="5" name="Espace réservé du texte 4">
+          <p:cNvPr id="3" name="Espace réservé du contenu 2">
             <a:extLst>
               <a:ext uri="{FF2B5EF4-FFF2-40B4-BE49-F238E27FC236}">
-                <a16:creationId xmlns:a16="http://schemas.microsoft.com/office/drawing/2014/main" id="{C8C8992F-8C34-F226-1E01-2A59D755ED7F}"/>
+                <a16:creationId xmlns:a16="http://schemas.microsoft.com/office/drawing/2014/main" id="{80D81803-23F0-4705-3E30-BE38DBBA89D6}"/>
               </a:ext>
             </a:extLst>
           </p:cNvPr>
@@ -45151,7 +45255,7 @@
             <a:spLocks noGrp="1"/>
           </p:cNvSpPr>
           <p:nvPr>
-            <p:ph type="body" idx="1"/>
+            <p:ph idx="1"/>
           </p:nvPr>
         </p:nvSpPr>
         <p:spPr/>
@@ -45159,14 +45263,22 @@
           <a:bodyPr/>
           <a:lstStyle/>
           <a:p>
-            <a:endParaRPr lang="fr-FR"/>
+            <a:r>
+              <a:rPr lang="fr-FR" dirty="0"/>
+              <a:t>Voir </a:t>
+            </a:r>
+            <a:r>
+              <a:rPr lang="fr-FR" dirty="0" err="1"/>
+              <a:t>capytale</a:t>
+            </a:r>
+            <a:endParaRPr lang="fr-FR" dirty="0"/>
           </a:p>
         </p:txBody>
       </p:sp>
     </p:spTree>
     <p:extLst>
       <p:ext uri="{BB962C8B-B14F-4D97-AF65-F5344CB8AC3E}">
-        <p14:creationId xmlns:p14="http://schemas.microsoft.com/office/powerpoint/2010/main" val="106158342"/>
+        <p14:creationId xmlns:p14="http://schemas.microsoft.com/office/powerpoint/2010/main" val="1890605723"/>
       </p:ext>
     </p:extLst>
   </p:cSld>

--- a/11_MaxPID/11_MaxPID_Corrige.pptx
+++ b/11_MaxPID/11_MaxPID_Corrige.pptx
@@ -386,7 +386,7 @@
           <a:p>
             <a:fld id="{D7F135F6-2A09-4FDD-9ECA-096E230CA0FA}" type="datetimeFigureOut">
               <a:rPr lang="fr-FR" smtClean="0"/>
-              <a:t>06/03/2026</a:t>
+              <a:t>09/03/2026</a:t>
             </a:fld>
             <a:endParaRPr lang="fr-FR"/>
           </a:p>
@@ -591,7 +591,7 @@
           <a:p>
             <a:fld id="{D7F135F6-2A09-4FDD-9ECA-096E230CA0FA}" type="datetimeFigureOut">
               <a:rPr lang="fr-FR" smtClean="0"/>
-              <a:t>06/03/2026</a:t>
+              <a:t>09/03/2026</a:t>
             </a:fld>
             <a:endParaRPr lang="fr-FR"/>
           </a:p>
@@ -847,7 +847,7 @@
           <a:p>
             <a:fld id="{D7F135F6-2A09-4FDD-9ECA-096E230CA0FA}" type="datetimeFigureOut">
               <a:rPr lang="fr-FR" smtClean="0"/>
-              <a:t>06/03/2026</a:t>
+              <a:t>09/03/2026</a:t>
             </a:fld>
             <a:endParaRPr lang="fr-FR"/>
           </a:p>
@@ -1053,7 +1053,7 @@
           <a:p>
             <a:fld id="{D7F135F6-2A09-4FDD-9ECA-096E230CA0FA}" type="datetimeFigureOut">
               <a:rPr lang="fr-FR" smtClean="0"/>
-              <a:t>06/03/2026</a:t>
+              <a:t>09/03/2026</a:t>
             </a:fld>
             <a:endParaRPr lang="fr-FR"/>
           </a:p>
@@ -1429,7 +1429,7 @@
           <a:p>
             <a:fld id="{D7F135F6-2A09-4FDD-9ECA-096E230CA0FA}" type="datetimeFigureOut">
               <a:rPr lang="fr-FR" smtClean="0"/>
-              <a:t>06/03/2026</a:t>
+              <a:t>09/03/2026</a:t>
             </a:fld>
             <a:endParaRPr lang="fr-FR"/>
           </a:p>
@@ -1704,7 +1704,7 @@
           <a:p>
             <a:fld id="{D7F135F6-2A09-4FDD-9ECA-096E230CA0FA}" type="datetimeFigureOut">
               <a:rPr lang="fr-FR" smtClean="0"/>
-              <a:t>06/03/2026</a:t>
+              <a:t>09/03/2026</a:t>
             </a:fld>
             <a:endParaRPr lang="fr-FR"/>
           </a:p>
@@ -2083,7 +2083,7 @@
           <a:p>
             <a:fld id="{D7F135F6-2A09-4FDD-9ECA-096E230CA0FA}" type="datetimeFigureOut">
               <a:rPr lang="fr-FR" smtClean="0"/>
-              <a:t>06/03/2026</a:t>
+              <a:t>09/03/2026</a:t>
             </a:fld>
             <a:endParaRPr lang="fr-FR"/>
           </a:p>
@@ -2201,7 +2201,7 @@
           <a:p>
             <a:fld id="{D7F135F6-2A09-4FDD-9ECA-096E230CA0FA}" type="datetimeFigureOut">
               <a:rPr lang="fr-FR" smtClean="0"/>
-              <a:t>06/03/2026</a:t>
+              <a:t>09/03/2026</a:t>
             </a:fld>
             <a:endParaRPr lang="fr-FR"/>
           </a:p>
@@ -2375,7 +2375,7 @@
           <a:p>
             <a:fld id="{D7F135F6-2A09-4FDD-9ECA-096E230CA0FA}" type="datetimeFigureOut">
               <a:rPr lang="fr-FR" smtClean="0"/>
-              <a:t>06/03/2026</a:t>
+              <a:t>09/03/2026</a:t>
             </a:fld>
             <a:endParaRPr lang="fr-FR"/>
           </a:p>
@@ -2732,7 +2732,7 @@
           <a:p>
             <a:fld id="{D7F135F6-2A09-4FDD-9ECA-096E230CA0FA}" type="datetimeFigureOut">
               <a:rPr lang="fr-FR" smtClean="0"/>
-              <a:t>06/03/2026</a:t>
+              <a:t>09/03/2026</a:t>
             </a:fld>
             <a:endParaRPr lang="fr-FR"/>
           </a:p>
@@ -3117,7 +3117,7 @@
           <a:p>
             <a:fld id="{D7F135F6-2A09-4FDD-9ECA-096E230CA0FA}" type="datetimeFigureOut">
               <a:rPr lang="fr-FR" smtClean="0"/>
-              <a:t>06/03/2026</a:t>
+              <a:t>09/03/2026</a:t>
             </a:fld>
             <a:endParaRPr lang="fr-FR"/>
           </a:p>
@@ -3421,7 +3421,7 @@
           <a:p>
             <a:fld id="{D7F135F6-2A09-4FDD-9ECA-096E230CA0FA}" type="datetimeFigureOut">
               <a:rPr lang="fr-FR" smtClean="0"/>
-              <a:t>06/03/2026</a:t>
+              <a:t>09/03/2026</a:t>
             </a:fld>
             <a:endParaRPr lang="fr-FR" dirty="0"/>
           </a:p>
@@ -37916,8 +37916,8 @@
           </p:sp>
         </mc:Fallback>
       </mc:AlternateContent>
-      <mc:AlternateContent xmlns:mc="http://schemas.openxmlformats.org/markup-compatibility/2006" xmlns:a14="http://schemas.microsoft.com/office/drawing/2010/main">
-        <mc:Choice Requires="a14">
+      <mc:AlternateContent xmlns:mc="http://schemas.openxmlformats.org/markup-compatibility/2006">
+        <mc:Choice xmlns:a14="http://schemas.microsoft.com/office/drawing/2010/main" Requires="a14">
           <p:sp>
             <p:nvSpPr>
               <p:cNvPr id="3" name="Espace réservé du contenu 2">
@@ -37937,7 +37937,7 @@
             <p:spPr>
               <a:xfrm>
                 <a:off x="117795" y="956486"/>
-                <a:ext cx="9197655" cy="5253339"/>
+                <a:ext cx="10809285" cy="5253339"/>
               </a:xfrm>
             </p:spPr>
             <p:txBody>
@@ -41457,7 +41457,7 @@
             </p:txBody>
           </p:sp>
         </mc:Choice>
-        <mc:Fallback xmlns="">
+        <mc:Fallback>
           <p:sp>
             <p:nvSpPr>
               <p:cNvPr id="3" name="Espace réservé du contenu 2">
@@ -41477,12 +41477,12 @@
             <p:spPr>
               <a:xfrm>
                 <a:off x="117795" y="956486"/>
-                <a:ext cx="9197655" cy="5253339"/>
+                <a:ext cx="10809285" cy="5253339"/>
               </a:xfrm>
               <a:blipFill>
                 <a:blip r:embed="rId3"/>
                 <a:stretch>
-                  <a:fillRect l="-4109"/>
+                  <a:fillRect l="-3495"/>
                 </a:stretch>
               </a:blipFill>
             </p:spPr>
@@ -41709,8 +41709,8 @@
           </p:sp>
         </mc:Fallback>
       </mc:AlternateContent>
-      <mc:AlternateContent xmlns:mc="http://schemas.openxmlformats.org/markup-compatibility/2006" xmlns:a14="http://schemas.microsoft.com/office/drawing/2010/main">
-        <mc:Choice Requires="a14">
+      <mc:AlternateContent xmlns:mc="http://schemas.openxmlformats.org/markup-compatibility/2006">
+        <mc:Choice xmlns:a14="http://schemas.microsoft.com/office/drawing/2010/main" Requires="a14">
           <p:sp>
             <p:nvSpPr>
               <p:cNvPr id="3" name="Espace réservé du contenu 2">
@@ -41730,7 +41730,7 @@
             <p:spPr>
               <a:xfrm>
                 <a:off x="117795" y="981887"/>
-                <a:ext cx="11718605" cy="5253339"/>
+                <a:ext cx="11718605" cy="5476063"/>
               </a:xfrm>
             </p:spPr>
             <p:txBody>
@@ -45080,7 +45080,7 @@
             </p:txBody>
           </p:sp>
         </mc:Choice>
-        <mc:Fallback xmlns="">
+        <mc:Fallback>
           <p:sp>
             <p:nvSpPr>
               <p:cNvPr id="3" name="Espace réservé du contenu 2">
@@ -45100,7 +45100,7 @@
             <p:spPr>
               <a:xfrm>
                 <a:off x="117795" y="981887"/>
-                <a:ext cx="11718605" cy="5253339"/>
+                <a:ext cx="11718605" cy="5476063"/>
               </a:xfrm>
               <a:blipFill>
                 <a:blip r:embed="rId3"/>

--- a/11_MaxPID/11_MaxPID_Corrige.pptx
+++ b/11_MaxPID/11_MaxPID_Corrige.pptx
@@ -22,10 +22,11 @@
     <p:sldId id="275" r:id="rId16"/>
     <p:sldId id="281" r:id="rId17"/>
     <p:sldId id="278" r:id="rId18"/>
-    <p:sldId id="276" r:id="rId19"/>
-    <p:sldId id="277" r:id="rId20"/>
-    <p:sldId id="282" r:id="rId21"/>
-    <p:sldId id="283" r:id="rId22"/>
+    <p:sldId id="289" r:id="rId19"/>
+    <p:sldId id="276" r:id="rId20"/>
+    <p:sldId id="277" r:id="rId21"/>
+    <p:sldId id="282" r:id="rId22"/>
+    <p:sldId id="283" r:id="rId23"/>
   </p:sldIdLst>
   <p:sldSz cx="12192000" cy="6858000"/>
   <p:notesSz cx="6858000" cy="9144000"/>
@@ -386,7 +387,7 @@
           <a:p>
             <a:fld id="{D7F135F6-2A09-4FDD-9ECA-096E230CA0FA}" type="datetimeFigureOut">
               <a:rPr lang="fr-FR" smtClean="0"/>
-              <a:t>09/03/2026</a:t>
+              <a:t>13/03/2026</a:t>
             </a:fld>
             <a:endParaRPr lang="fr-FR"/>
           </a:p>
@@ -591,7 +592,7 @@
           <a:p>
             <a:fld id="{D7F135F6-2A09-4FDD-9ECA-096E230CA0FA}" type="datetimeFigureOut">
               <a:rPr lang="fr-FR" smtClean="0"/>
-              <a:t>09/03/2026</a:t>
+              <a:t>13/03/2026</a:t>
             </a:fld>
             <a:endParaRPr lang="fr-FR"/>
           </a:p>
@@ -847,7 +848,7 @@
           <a:p>
             <a:fld id="{D7F135F6-2A09-4FDD-9ECA-096E230CA0FA}" type="datetimeFigureOut">
               <a:rPr lang="fr-FR" smtClean="0"/>
-              <a:t>09/03/2026</a:t>
+              <a:t>13/03/2026</a:t>
             </a:fld>
             <a:endParaRPr lang="fr-FR"/>
           </a:p>
@@ -1053,7 +1054,7 @@
           <a:p>
             <a:fld id="{D7F135F6-2A09-4FDD-9ECA-096E230CA0FA}" type="datetimeFigureOut">
               <a:rPr lang="fr-FR" smtClean="0"/>
-              <a:t>09/03/2026</a:t>
+              <a:t>13/03/2026</a:t>
             </a:fld>
             <a:endParaRPr lang="fr-FR"/>
           </a:p>
@@ -1429,7 +1430,7 @@
           <a:p>
             <a:fld id="{D7F135F6-2A09-4FDD-9ECA-096E230CA0FA}" type="datetimeFigureOut">
               <a:rPr lang="fr-FR" smtClean="0"/>
-              <a:t>09/03/2026</a:t>
+              <a:t>13/03/2026</a:t>
             </a:fld>
             <a:endParaRPr lang="fr-FR"/>
           </a:p>
@@ -1704,7 +1705,7 @@
           <a:p>
             <a:fld id="{D7F135F6-2A09-4FDD-9ECA-096E230CA0FA}" type="datetimeFigureOut">
               <a:rPr lang="fr-FR" smtClean="0"/>
-              <a:t>09/03/2026</a:t>
+              <a:t>13/03/2026</a:t>
             </a:fld>
             <a:endParaRPr lang="fr-FR"/>
           </a:p>
@@ -2083,7 +2084,7 @@
           <a:p>
             <a:fld id="{D7F135F6-2A09-4FDD-9ECA-096E230CA0FA}" type="datetimeFigureOut">
               <a:rPr lang="fr-FR" smtClean="0"/>
-              <a:t>09/03/2026</a:t>
+              <a:t>13/03/2026</a:t>
             </a:fld>
             <a:endParaRPr lang="fr-FR"/>
           </a:p>
@@ -2201,7 +2202,7 @@
           <a:p>
             <a:fld id="{D7F135F6-2A09-4FDD-9ECA-096E230CA0FA}" type="datetimeFigureOut">
               <a:rPr lang="fr-FR" smtClean="0"/>
-              <a:t>09/03/2026</a:t>
+              <a:t>13/03/2026</a:t>
             </a:fld>
             <a:endParaRPr lang="fr-FR"/>
           </a:p>
@@ -2375,7 +2376,7 @@
           <a:p>
             <a:fld id="{D7F135F6-2A09-4FDD-9ECA-096E230CA0FA}" type="datetimeFigureOut">
               <a:rPr lang="fr-FR" smtClean="0"/>
-              <a:t>09/03/2026</a:t>
+              <a:t>13/03/2026</a:t>
             </a:fld>
             <a:endParaRPr lang="fr-FR"/>
           </a:p>
@@ -2732,7 +2733,7 @@
           <a:p>
             <a:fld id="{D7F135F6-2A09-4FDD-9ECA-096E230CA0FA}" type="datetimeFigureOut">
               <a:rPr lang="fr-FR" smtClean="0"/>
-              <a:t>09/03/2026</a:t>
+              <a:t>13/03/2026</a:t>
             </a:fld>
             <a:endParaRPr lang="fr-FR"/>
           </a:p>
@@ -3117,7 +3118,7 @@
           <a:p>
             <a:fld id="{D7F135F6-2A09-4FDD-9ECA-096E230CA0FA}" type="datetimeFigureOut">
               <a:rPr lang="fr-FR" smtClean="0"/>
-              <a:t>09/03/2026</a:t>
+              <a:t>13/03/2026</a:t>
             </a:fld>
             <a:endParaRPr lang="fr-FR"/>
           </a:p>
@@ -3421,7 +3422,7 @@
           <a:p>
             <a:fld id="{D7F135F6-2A09-4FDD-9ECA-096E230CA0FA}" type="datetimeFigureOut">
               <a:rPr lang="fr-FR" smtClean="0"/>
-              <a:t>09/03/2026</a:t>
+              <a:t>13/03/2026</a:t>
             </a:fld>
             <a:endParaRPr lang="fr-FR" dirty="0"/>
           </a:p>
@@ -15837,63 +15838,63 @@
           <a:lstStyle/>
           <a:p>
             <a:r>
-              <a:rPr lang="fr-FR" dirty="0"/>
+              <a:rPr lang="fr-FR" sz="2400" dirty="0"/>
               <a:t> Energie cinétique</a:t>
             </a:r>
           </a:p>
           <a:p>
             <a:pPr lvl="1"/>
             <a:r>
-              <a:rPr lang="fr-FR" dirty="0"/>
+              <a:rPr lang="fr-FR" sz="2000" dirty="0"/>
               <a:t>Relation cinématique</a:t>
             </a:r>
           </a:p>
           <a:p>
             <a:pPr lvl="2"/>
             <a:r>
-              <a:rPr lang="fr-FR" dirty="0"/>
+              <a:rPr lang="fr-FR" sz="1600" dirty="0"/>
               <a:t>Expérimentalement</a:t>
             </a:r>
           </a:p>
           <a:p>
             <a:pPr lvl="2"/>
             <a:r>
-              <a:rPr lang="fr-FR" dirty="0"/>
+              <a:rPr lang="fr-FR" sz="1600" dirty="0"/>
               <a:t>Avec la documentation</a:t>
             </a:r>
           </a:p>
           <a:p>
             <a:pPr lvl="1"/>
             <a:r>
-              <a:rPr lang="fr-FR" dirty="0"/>
+              <a:rPr lang="fr-FR" sz="2000" dirty="0"/>
               <a:t>Energie cinétique ensemble stator</a:t>
             </a:r>
           </a:p>
           <a:p>
             <a:pPr lvl="2"/>
             <a:r>
-              <a:rPr lang="fr-FR" dirty="0"/>
+              <a:rPr lang="fr-FR" sz="1600" dirty="0"/>
               <a:t>Inertie stator : peser stator + SW</a:t>
             </a:r>
           </a:p>
           <a:p>
             <a:pPr lvl="1"/>
             <a:r>
-              <a:rPr lang="fr-FR" dirty="0"/>
+              <a:rPr lang="fr-FR" sz="2000" dirty="0"/>
               <a:t>Energie cinétique ensemble rotor</a:t>
             </a:r>
           </a:p>
           <a:p>
             <a:pPr lvl="1"/>
             <a:r>
-              <a:rPr lang="fr-FR" dirty="0"/>
+              <a:rPr lang="fr-FR" sz="2000" dirty="0"/>
               <a:t>Energie cinétique écrou</a:t>
             </a:r>
           </a:p>
           <a:p>
             <a:pPr lvl="1"/>
             <a:r>
-              <a:rPr lang="fr-FR" dirty="0"/>
+              <a:rPr lang="fr-FR" sz="2000" dirty="0"/>
               <a:t>Energie cinétique ensemble bras</a:t>
             </a:r>
           </a:p>
@@ -17953,7 +17954,7 @@
                 </a14:m>
                 <a:r>
                   <a:rPr lang="fr-FR" sz="1200" dirty="0"/>
-                  <a:t>(Le stator est un solide de révolution, on peut faire le calcul dans la base 1).</a:t>
+                  <a:t>(Le rotor est un solide de révolution, on peut faire le calcul dans la base 1).</a:t>
                 </a:r>
               </a:p>
               <a:p>
@@ -19750,7 +19751,7 @@
               <a:blipFill>
                 <a:blip r:embed="rId2"/>
                 <a:stretch>
-                  <a:fillRect l="-1699" t="-1972" r="-647"/>
+                  <a:fillRect l="-1699" t="-1972"/>
                 </a:stretch>
               </a:blipFill>
             </p:spPr>
@@ -19870,7 +19871,7 @@
             <p:ph idx="1"/>
             <p:extLst>
               <p:ext uri="{D42A27DB-BD31-4B8C-83A1-F6EECF244321}">
-                <p14:modId xmlns:p14="http://schemas.microsoft.com/office/powerpoint/2010/main" val="1674635360"/>
+                <p14:modId xmlns:p14="http://schemas.microsoft.com/office/powerpoint/2010/main" val="404591913"/>
               </p:ext>
             </p:extLst>
           </p:nvPr>
@@ -22739,6 +22740,512 @@
           <p:cNvPr id="2" name="Titre 1">
             <a:extLst>
               <a:ext uri="{FF2B5EF4-FFF2-40B4-BE49-F238E27FC236}">
+                <a16:creationId xmlns:a16="http://schemas.microsoft.com/office/drawing/2014/main" id="{2726409C-663F-3CCA-AD2B-00D7EBE11C74}"/>
+              </a:ext>
+            </a:extLst>
+          </p:cNvPr>
+          <p:cNvSpPr>
+            <a:spLocks noGrp="1"/>
+          </p:cNvSpPr>
+          <p:nvPr>
+            <p:ph type="title"/>
+          </p:nvPr>
+        </p:nvSpPr>
+        <p:spPr/>
+        <p:txBody>
+          <a:bodyPr/>
+          <a:lstStyle/>
+          <a:p>
+            <a:r>
+              <a:rPr lang="fr-FR" dirty="0"/>
+              <a:t>Hypothèses – cinématique </a:t>
+            </a:r>
+          </a:p>
+        </p:txBody>
+      </p:sp>
+      <mc:AlternateContent xmlns:mc="http://schemas.openxmlformats.org/markup-compatibility/2006">
+        <mc:Choice xmlns:a14="http://schemas.microsoft.com/office/drawing/2010/main" Requires="a14">
+          <p:sp>
+            <p:nvSpPr>
+              <p:cNvPr id="3" name="Espace réservé du contenu 2">
+                <a:extLst>
+                  <a:ext uri="{FF2B5EF4-FFF2-40B4-BE49-F238E27FC236}">
+                    <a16:creationId xmlns:a16="http://schemas.microsoft.com/office/drawing/2014/main" id="{EAEEF773-FB9F-681C-9BFA-69EF1BD78DE4}"/>
+                  </a:ext>
+                </a:extLst>
+              </p:cNvPr>
+              <p:cNvSpPr>
+                <a:spLocks noGrp="1"/>
+              </p:cNvSpPr>
+              <p:nvPr>
+                <p:ph idx="1"/>
+              </p:nvPr>
+            </p:nvSpPr>
+            <p:spPr/>
+            <p:txBody>
+              <a:bodyPr/>
+              <a:lstStyle/>
+              <a:p>
+                <a14:m>
+                  <m:oMath xmlns:m="http://schemas.openxmlformats.org/officeDocument/2006/math">
+                    <m:acc>
+                      <m:accPr>
+                        <m:chr m:val="̇"/>
+                        <m:ctrlPr>
+                          <a:rPr lang="fr-FR" i="1" smtClean="0">
+                            <a:latin typeface="Cambria Math" panose="02040503050406030204" pitchFamily="18" charset="0"/>
+                          </a:rPr>
+                        </m:ctrlPr>
+                      </m:accPr>
+                      <m:e>
+                        <m:r>
+                          <a:rPr lang="fr-FR" b="0" i="1" smtClean="0">
+                            <a:latin typeface="Cambria Math" panose="02040503050406030204" pitchFamily="18" charset="0"/>
+                          </a:rPr>
+                          <m:t>𝛾</m:t>
+                        </m:r>
+                      </m:e>
+                    </m:acc>
+                    <m:r>
+                      <a:rPr lang="fr-FR" b="0" i="1" smtClean="0">
+                        <a:latin typeface="Cambria Math" panose="02040503050406030204" pitchFamily="18" charset="0"/>
+                      </a:rPr>
+                      <m:t>≃</m:t>
+                    </m:r>
+                    <m:f>
+                      <m:fPr>
+                        <m:ctrlPr>
+                          <a:rPr lang="fr-FR" b="0" i="1" smtClean="0">
+                            <a:latin typeface="Cambria Math" panose="02040503050406030204" pitchFamily="18" charset="0"/>
+                          </a:rPr>
+                        </m:ctrlPr>
+                      </m:fPr>
+                      <m:num>
+                        <m:r>
+                          <a:rPr lang="fr-FR" b="0" i="1" smtClean="0">
+                            <a:latin typeface="Cambria Math" panose="02040503050406030204" pitchFamily="18" charset="0"/>
+                          </a:rPr>
+                          <m:t>300</m:t>
+                        </m:r>
+                      </m:num>
+                      <m:den>
+                        <m:r>
+                          <a:rPr lang="fr-FR" b="0" i="1" smtClean="0">
+                            <a:latin typeface="Cambria Math" panose="02040503050406030204" pitchFamily="18" charset="0"/>
+                          </a:rPr>
+                          <m:t>2,5</m:t>
+                        </m:r>
+                      </m:den>
+                    </m:f>
+                    <m:acc>
+                      <m:accPr>
+                        <m:chr m:val="̇"/>
+                        <m:ctrlPr>
+                          <a:rPr lang="fr-FR" i="1">
+                            <a:latin typeface="Cambria Math" panose="02040503050406030204" pitchFamily="18" charset="0"/>
+                          </a:rPr>
+                        </m:ctrlPr>
+                      </m:accPr>
+                      <m:e>
+                        <m:r>
+                          <a:rPr lang="fr-FR" i="1">
+                            <a:latin typeface="Cambria Math" panose="02040503050406030204" pitchFamily="18" charset="0"/>
+                          </a:rPr>
+                          <m:t>𝜃</m:t>
+                        </m:r>
+                      </m:e>
+                    </m:acc>
+                    <m:r>
+                      <a:rPr lang="fr-FR" b="0" i="1" smtClean="0">
+                        <a:latin typeface="Cambria Math" panose="02040503050406030204" pitchFamily="18" charset="0"/>
+                      </a:rPr>
+                      <m:t>=</m:t>
+                    </m:r>
+                    <m:r>
+                      <a:rPr lang="fr-FR" b="0" i="1" smtClean="0">
+                        <a:latin typeface="Cambria Math" panose="02040503050406030204" pitchFamily="18" charset="0"/>
+                      </a:rPr>
+                      <m:t>120 </m:t>
+                    </m:r>
+                    <m:acc>
+                      <m:accPr>
+                        <m:chr m:val="̇"/>
+                        <m:ctrlPr>
+                          <a:rPr lang="fr-FR" i="1">
+                            <a:latin typeface="Cambria Math" panose="02040503050406030204" pitchFamily="18" charset="0"/>
+                          </a:rPr>
+                        </m:ctrlPr>
+                      </m:accPr>
+                      <m:e>
+                        <m:r>
+                          <a:rPr lang="fr-FR" b="0" i="1" smtClean="0">
+                            <a:latin typeface="Cambria Math" panose="02040503050406030204" pitchFamily="18" charset="0"/>
+                          </a:rPr>
+                          <m:t>𝜃</m:t>
+                        </m:r>
+                      </m:e>
+                    </m:acc>
+                  </m:oMath>
+                </a14:m>
+                <a:endParaRPr lang="fr-FR" i="1" dirty="0">
+                  <a:latin typeface="Cambria Math" panose="02040503050406030204" pitchFamily="18" charset="0"/>
+                </a:endParaRPr>
+              </a:p>
+              <a:p>
+                <a14:m>
+                  <m:oMath xmlns:m="http://schemas.openxmlformats.org/officeDocument/2006/math">
+                    <m:acc>
+                      <m:accPr>
+                        <m:chr m:val="̇"/>
+                        <m:ctrlPr>
+                          <a:rPr lang="fr-FR" i="1">
+                            <a:latin typeface="Cambria Math" panose="02040503050406030204" pitchFamily="18" charset="0"/>
+                          </a:rPr>
+                        </m:ctrlPr>
+                      </m:accPr>
+                      <m:e>
+                        <m:r>
+                          <a:rPr lang="fr-FR" b="0" i="1" smtClean="0">
+                            <a:latin typeface="Cambria Math" panose="02040503050406030204" pitchFamily="18" charset="0"/>
+                          </a:rPr>
+                          <m:t>𝜆</m:t>
+                        </m:r>
+                      </m:e>
+                    </m:acc>
+                    <m:r>
+                      <a:rPr lang="fr-FR" b="0" i="1" smtClean="0">
+                        <a:latin typeface="Cambria Math" panose="02040503050406030204" pitchFamily="18" charset="0"/>
+                      </a:rPr>
+                      <m:t>≃−</m:t>
+                    </m:r>
+                    <m:f>
+                      <m:fPr>
+                        <m:ctrlPr>
+                          <a:rPr lang="fr-FR" b="0" i="1" smtClean="0">
+                            <a:latin typeface="Cambria Math" panose="02040503050406030204" pitchFamily="18" charset="0"/>
+                          </a:rPr>
+                        </m:ctrlPr>
+                      </m:fPr>
+                      <m:num>
+                        <m:r>
+                          <a:rPr lang="fr-FR" b="0" i="1" smtClean="0">
+                            <a:latin typeface="Cambria Math" panose="02040503050406030204" pitchFamily="18" charset="0"/>
+                          </a:rPr>
+                          <m:t>200</m:t>
+                        </m:r>
+                      </m:num>
+                      <m:den>
+                        <m:r>
+                          <a:rPr lang="fr-FR" b="0" i="1" smtClean="0">
+                            <a:latin typeface="Cambria Math" panose="02040503050406030204" pitchFamily="18" charset="0"/>
+                          </a:rPr>
+                          <m:t>1000×2,5</m:t>
+                        </m:r>
+                      </m:den>
+                    </m:f>
+                    <m:acc>
+                      <m:accPr>
+                        <m:chr m:val="̇"/>
+                        <m:ctrlPr>
+                          <a:rPr lang="fr-FR" i="1" smtClean="0">
+                            <a:latin typeface="Cambria Math" panose="02040503050406030204" pitchFamily="18" charset="0"/>
+                          </a:rPr>
+                        </m:ctrlPr>
+                      </m:accPr>
+                      <m:e>
+                        <m:r>
+                          <a:rPr lang="fr-FR" i="1">
+                            <a:latin typeface="Cambria Math" panose="02040503050406030204" pitchFamily="18" charset="0"/>
+                          </a:rPr>
+                          <m:t>𝜃</m:t>
+                        </m:r>
+                      </m:e>
+                    </m:acc>
+                    <m:r>
+                      <a:rPr lang="fr-FR" b="0" i="1" smtClean="0">
+                        <a:latin typeface="Cambria Math" panose="02040503050406030204" pitchFamily="18" charset="0"/>
+                      </a:rPr>
+                      <m:t>=0,08</m:t>
+                    </m:r>
+                    <m:acc>
+                      <m:accPr>
+                        <m:chr m:val="̇"/>
+                        <m:ctrlPr>
+                          <a:rPr lang="fr-FR" i="1">
+                            <a:latin typeface="Cambria Math" panose="02040503050406030204" pitchFamily="18" charset="0"/>
+                          </a:rPr>
+                        </m:ctrlPr>
+                      </m:accPr>
+                      <m:e>
+                        <m:r>
+                          <a:rPr lang="fr-FR" i="1">
+                            <a:latin typeface="Cambria Math" panose="02040503050406030204" pitchFamily="18" charset="0"/>
+                          </a:rPr>
+                          <m:t>𝜃</m:t>
+                        </m:r>
+                      </m:e>
+                    </m:acc>
+                  </m:oMath>
+                </a14:m>
+                <a:endParaRPr lang="fr-FR" i="1" dirty="0">
+                  <a:latin typeface="Cambria Math" panose="02040503050406030204" pitchFamily="18" charset="0"/>
+                </a:endParaRPr>
+              </a:p>
+              <a:p>
+                <a14:m>
+                  <m:oMath xmlns:m="http://schemas.openxmlformats.org/officeDocument/2006/math">
+                    <m:acc>
+                      <m:accPr>
+                        <m:chr m:val="̇"/>
+                        <m:ctrlPr>
+                          <a:rPr lang="fr-FR" i="1">
+                            <a:latin typeface="Cambria Math" panose="02040503050406030204" pitchFamily="18" charset="0"/>
+                          </a:rPr>
+                        </m:ctrlPr>
+                      </m:accPr>
+                      <m:e>
+                        <m:r>
+                          <a:rPr lang="fr-FR" b="0" i="1" smtClean="0">
+                            <a:latin typeface="Cambria Math" panose="02040503050406030204" pitchFamily="18" charset="0"/>
+                          </a:rPr>
+                          <m:t>𝛽</m:t>
+                        </m:r>
+                      </m:e>
+                    </m:acc>
+                    <m:r>
+                      <a:rPr lang="fr-FR" i="1">
+                        <a:latin typeface="Cambria Math" panose="02040503050406030204" pitchFamily="18" charset="0"/>
+                      </a:rPr>
+                      <m:t>≃</m:t>
+                    </m:r>
+                    <m:f>
+                      <m:fPr>
+                        <m:ctrlPr>
+                          <a:rPr lang="fr-FR" b="0" i="1" smtClean="0">
+                            <a:latin typeface="Cambria Math" panose="02040503050406030204" pitchFamily="18" charset="0"/>
+                          </a:rPr>
+                        </m:ctrlPr>
+                      </m:fPr>
+                      <m:num>
+                        <m:r>
+                          <a:rPr lang="fr-FR" b="0" i="1" smtClean="0">
+                            <a:latin typeface="Cambria Math" panose="02040503050406030204" pitchFamily="18" charset="0"/>
+                          </a:rPr>
+                          <m:t>1</m:t>
+                        </m:r>
+                      </m:num>
+                      <m:den>
+                        <m:r>
+                          <a:rPr lang="fr-FR" b="0" i="1" smtClean="0">
+                            <a:latin typeface="Cambria Math" panose="02040503050406030204" pitchFamily="18" charset="0"/>
+                          </a:rPr>
+                          <m:t>2,5</m:t>
+                        </m:r>
+                      </m:den>
+                    </m:f>
+                    <m:acc>
+                      <m:accPr>
+                        <m:chr m:val="̇"/>
+                        <m:ctrlPr>
+                          <a:rPr lang="fr-FR" i="1">
+                            <a:latin typeface="Cambria Math" panose="02040503050406030204" pitchFamily="18" charset="0"/>
+                          </a:rPr>
+                        </m:ctrlPr>
+                      </m:accPr>
+                      <m:e>
+                        <m:r>
+                          <a:rPr lang="fr-FR" i="1">
+                            <a:latin typeface="Cambria Math" panose="02040503050406030204" pitchFamily="18" charset="0"/>
+                          </a:rPr>
+                          <m:t>𝜃</m:t>
+                        </m:r>
+                      </m:e>
+                    </m:acc>
+                    <m:r>
+                      <a:rPr lang="fr-FR" b="0" i="1" smtClean="0">
+                        <a:latin typeface="Cambria Math" panose="02040503050406030204" pitchFamily="18" charset="0"/>
+                      </a:rPr>
+                      <m:t>≃0,4</m:t>
+                    </m:r>
+                    <m:acc>
+                      <m:accPr>
+                        <m:chr m:val="̇"/>
+                        <m:ctrlPr>
+                          <a:rPr lang="fr-FR" i="1">
+                            <a:latin typeface="Cambria Math" panose="02040503050406030204" pitchFamily="18" charset="0"/>
+                          </a:rPr>
+                        </m:ctrlPr>
+                      </m:accPr>
+                      <m:e>
+                        <m:r>
+                          <a:rPr lang="fr-FR" i="1">
+                            <a:latin typeface="Cambria Math" panose="02040503050406030204" pitchFamily="18" charset="0"/>
+                          </a:rPr>
+                          <m:t>𝜃</m:t>
+                        </m:r>
+                      </m:e>
+                    </m:acc>
+                  </m:oMath>
+                </a14:m>
+                <a:endParaRPr lang="fr-FR" i="1" dirty="0">
+                  <a:latin typeface="Cambria Math" panose="02040503050406030204" pitchFamily="18" charset="0"/>
+                </a:endParaRPr>
+              </a:p>
+              <a:p>
+                <a:endParaRPr lang="fr-FR" i="1" dirty="0">
+                  <a:latin typeface="Cambria Math" panose="02040503050406030204" pitchFamily="18" charset="0"/>
+                </a:endParaRPr>
+              </a:p>
+              <a:p>
+                <a:endParaRPr lang="fr-FR" i="1" dirty="0">
+                  <a:latin typeface="Cambria Math" panose="02040503050406030204" pitchFamily="18" charset="0"/>
+                </a:endParaRPr>
+              </a:p>
+              <a:p>
+                <a:endParaRPr lang="fr-FR" b="0" i="1" dirty="0">
+                  <a:latin typeface="Cambria Math" panose="02040503050406030204" pitchFamily="18" charset="0"/>
+                </a:endParaRPr>
+              </a:p>
+              <a:p>
+                <a:pPr marL="1588" indent="0">
+                  <a:buNone/>
+                </a:pPr>
+                <a14:m>
+                  <m:oMathPara xmlns:m="http://schemas.openxmlformats.org/officeDocument/2006/math">
+                    <m:oMathParaPr>
+                      <m:jc m:val="centerGroup"/>
+                    </m:oMathParaPr>
+                    <m:oMath xmlns:m="http://schemas.openxmlformats.org/officeDocument/2006/math">
+                      <m:r>
+                        <a:rPr lang="fr-FR" b="0" i="1" smtClean="0">
+                          <a:latin typeface="Cambria Math" panose="02040503050406030204" pitchFamily="18" charset="0"/>
+                        </a:rPr>
+                        <m:t> </m:t>
+                      </m:r>
+                    </m:oMath>
+                  </m:oMathPara>
+                </a14:m>
+                <a:endParaRPr lang="fr-FR" dirty="0"/>
+              </a:p>
+            </p:txBody>
+          </p:sp>
+        </mc:Choice>
+        <mc:Fallback>
+          <p:sp>
+            <p:nvSpPr>
+              <p:cNvPr id="3" name="Espace réservé du contenu 2">
+                <a:extLst>
+                  <a:ext uri="{FF2B5EF4-FFF2-40B4-BE49-F238E27FC236}">
+                    <a16:creationId xmlns:a16="http://schemas.microsoft.com/office/drawing/2014/main" id="{EAEEF773-FB9F-681C-9BFA-69EF1BD78DE4}"/>
+                  </a:ext>
+                </a:extLst>
+              </p:cNvPr>
+              <p:cNvSpPr>
+                <a:spLocks noGrp="1" noRot="1" noChangeAspect="1" noMove="1" noResize="1" noEditPoints="1" noAdjustHandles="1" noChangeArrowheads="1" noChangeShapeType="1" noTextEdit="1"/>
+              </p:cNvSpPr>
+              <p:nvPr>
+                <p:ph idx="1"/>
+              </p:nvPr>
+            </p:nvSpPr>
+            <p:spPr>
+              <a:blipFill>
+                <a:blip r:embed="rId2"/>
+                <a:stretch>
+                  <a:fillRect/>
+                </a:stretch>
+              </a:blipFill>
+            </p:spPr>
+            <p:txBody>
+              <a:bodyPr/>
+              <a:lstStyle/>
+              <a:p>
+                <a:r>
+                  <a:rPr lang="fr-FR">
+                    <a:noFill/>
+                  </a:rPr>
+                  <a:t> </a:t>
+                </a:r>
+              </a:p>
+            </p:txBody>
+          </p:sp>
+        </mc:Fallback>
+      </mc:AlternateContent>
+      <p:pic>
+        <p:nvPicPr>
+          <p:cNvPr id="4" name="Espace réservé du contenu 3">
+            <a:extLst>
+              <a:ext uri="{FF2B5EF4-FFF2-40B4-BE49-F238E27FC236}">
+                <a16:creationId xmlns:a16="http://schemas.microsoft.com/office/drawing/2014/main" id="{BB894528-9978-F6ED-7249-C4F488375D6D}"/>
+              </a:ext>
+            </a:extLst>
+          </p:cNvPr>
+          <p:cNvPicPr>
+            <a:picLocks noChangeAspect="1"/>
+          </p:cNvPicPr>
+          <p:nvPr/>
+        </p:nvPicPr>
+        <p:blipFill>
+          <a:blip r:embed="rId3">
+            <a:extLst>
+              <a:ext uri="{28A0092B-C50C-407E-A947-70E740481C1C}">
+                <a14:useLocalDpi xmlns:a14="http://schemas.microsoft.com/office/drawing/2010/main" val="0"/>
+              </a:ext>
+            </a:extLst>
+          </a:blip>
+          <a:srcRect/>
+          <a:stretch>
+            <a:fillRect/>
+          </a:stretch>
+        </p:blipFill>
+        <p:spPr bwMode="auto">
+          <a:xfrm>
+            <a:off x="6821168" y="982189"/>
+            <a:ext cx="5253037" cy="5253037"/>
+          </a:xfrm>
+          <a:prstGeom prst="rect">
+            <a:avLst/>
+          </a:prstGeom>
+          <a:noFill/>
+          <a:ln>
+            <a:noFill/>
+          </a:ln>
+        </p:spPr>
+      </p:pic>
+    </p:spTree>
+    <p:extLst>
+      <p:ext uri="{BB962C8B-B14F-4D97-AF65-F5344CB8AC3E}">
+        <p14:creationId xmlns:p14="http://schemas.microsoft.com/office/powerpoint/2010/main" val="4218666495"/>
+      </p:ext>
+    </p:extLst>
+  </p:cSld>
+  <p:clrMapOvr>
+    <a:masterClrMapping/>
+  </p:clrMapOvr>
+</p:sld>
+</file>
+
+<file path=ppt/slides/slide19.xml><?xml version="1.0" encoding="utf-8"?>
+<p:sld xmlns:a="http://schemas.openxmlformats.org/drawingml/2006/main" xmlns:r="http://schemas.openxmlformats.org/officeDocument/2006/relationships" xmlns:p="http://schemas.openxmlformats.org/presentationml/2006/main">
+  <p:cSld>
+    <p:spTree>
+      <p:nvGrpSpPr>
+        <p:cNvPr id="1" name=""/>
+        <p:cNvGrpSpPr/>
+        <p:nvPr/>
+      </p:nvGrpSpPr>
+      <p:grpSpPr>
+        <a:xfrm>
+          <a:off x="0" y="0"/>
+          <a:ext cx="0" cy="0"/>
+          <a:chOff x="0" y="0"/>
+          <a:chExt cx="0" cy="0"/>
+        </a:xfrm>
+      </p:grpSpPr>
+      <p:sp>
+        <p:nvSpPr>
+          <p:cNvPr id="2" name="Titre 1">
+            <a:extLst>
+              <a:ext uri="{FF2B5EF4-FFF2-40B4-BE49-F238E27FC236}">
                 <a16:creationId xmlns:a16="http://schemas.microsoft.com/office/drawing/2014/main" id="{0880FE2C-A2DB-EC9F-19A8-C313B7295FF7}"/>
               </a:ext>
             </a:extLst>
@@ -23124,7 +23631,87 @@
 </p:sld>
 </file>
 
-<file path=ppt/slides/slide19.xml><?xml version="1.0" encoding="utf-8"?>
+<file path=ppt/slides/slide2.xml><?xml version="1.0" encoding="utf-8"?>
+<p:sld xmlns:a="http://schemas.openxmlformats.org/drawingml/2006/main" xmlns:r="http://schemas.openxmlformats.org/officeDocument/2006/relationships" xmlns:p="http://schemas.openxmlformats.org/presentationml/2006/main">
+  <p:cSld>
+    <p:spTree>
+      <p:nvGrpSpPr>
+        <p:cNvPr id="1" name=""/>
+        <p:cNvGrpSpPr/>
+        <p:nvPr/>
+      </p:nvGrpSpPr>
+      <p:grpSpPr>
+        <a:xfrm>
+          <a:off x="0" y="0"/>
+          <a:ext cx="0" cy="0"/>
+          <a:chOff x="0" y="0"/>
+          <a:chExt cx="0" cy="0"/>
+        </a:xfrm>
+      </p:grpSpPr>
+      <p:sp>
+        <p:nvSpPr>
+          <p:cNvPr id="2" name="Titre 1">
+            <a:extLst>
+              <a:ext uri="{FF2B5EF4-FFF2-40B4-BE49-F238E27FC236}">
+                <a16:creationId xmlns:a16="http://schemas.microsoft.com/office/drawing/2014/main" id="{2B23CFB6-C96F-2738-656C-799A569A57DB}"/>
+              </a:ext>
+            </a:extLst>
+          </p:cNvPr>
+          <p:cNvSpPr>
+            <a:spLocks noGrp="1"/>
+          </p:cNvSpPr>
+          <p:nvPr>
+            <p:ph type="title"/>
+          </p:nvPr>
+        </p:nvSpPr>
+        <p:spPr/>
+        <p:txBody>
+          <a:bodyPr/>
+          <a:lstStyle/>
+          <a:p>
+            <a:endParaRPr lang="fr-FR"/>
+          </a:p>
+        </p:txBody>
+      </p:sp>
+      <p:sp>
+        <p:nvSpPr>
+          <p:cNvPr id="3" name="Espace réservé du contenu 2">
+            <a:extLst>
+              <a:ext uri="{FF2B5EF4-FFF2-40B4-BE49-F238E27FC236}">
+                <a16:creationId xmlns:a16="http://schemas.microsoft.com/office/drawing/2014/main" id="{63A0F49C-2000-CFFA-4CC2-9D86BC1329D8}"/>
+              </a:ext>
+            </a:extLst>
+          </p:cNvPr>
+          <p:cNvSpPr>
+            <a:spLocks noGrp="1"/>
+          </p:cNvSpPr>
+          <p:nvPr>
+            <p:ph idx="1"/>
+          </p:nvPr>
+        </p:nvSpPr>
+        <p:spPr/>
+        <p:txBody>
+          <a:bodyPr/>
+          <a:lstStyle/>
+          <a:p>
+            <a:endParaRPr lang="fr-FR" dirty="0"/>
+          </a:p>
+        </p:txBody>
+      </p:sp>
+    </p:spTree>
+    <p:extLst>
+      <p:ext uri="{BB962C8B-B14F-4D97-AF65-F5344CB8AC3E}">
+        <p14:creationId xmlns:p14="http://schemas.microsoft.com/office/powerpoint/2010/main" val="696684578"/>
+      </p:ext>
+    </p:extLst>
+  </p:cSld>
+  <p:clrMapOvr>
+    <a:masterClrMapping/>
+  </p:clrMapOvr>
+</p:sld>
+</file>
+
+<file path=ppt/slides/slide20.xml><?xml version="1.0" encoding="utf-8"?>
 <p:sld xmlns:a="http://schemas.openxmlformats.org/drawingml/2006/main" xmlns:r="http://schemas.openxmlformats.org/officeDocument/2006/relationships" xmlns:p="http://schemas.openxmlformats.org/presentationml/2006/main">
   <p:cSld>
     <p:spTree>
@@ -23466,87 +24053,7 @@
 </p:sld>
 </file>
 
-<file path=ppt/slides/slide2.xml><?xml version="1.0" encoding="utf-8"?>
-<p:sld xmlns:a="http://schemas.openxmlformats.org/drawingml/2006/main" xmlns:r="http://schemas.openxmlformats.org/officeDocument/2006/relationships" xmlns:p="http://schemas.openxmlformats.org/presentationml/2006/main">
-  <p:cSld>
-    <p:spTree>
-      <p:nvGrpSpPr>
-        <p:cNvPr id="1" name=""/>
-        <p:cNvGrpSpPr/>
-        <p:nvPr/>
-      </p:nvGrpSpPr>
-      <p:grpSpPr>
-        <a:xfrm>
-          <a:off x="0" y="0"/>
-          <a:ext cx="0" cy="0"/>
-          <a:chOff x="0" y="0"/>
-          <a:chExt cx="0" cy="0"/>
-        </a:xfrm>
-      </p:grpSpPr>
-      <p:sp>
-        <p:nvSpPr>
-          <p:cNvPr id="2" name="Titre 1">
-            <a:extLst>
-              <a:ext uri="{FF2B5EF4-FFF2-40B4-BE49-F238E27FC236}">
-                <a16:creationId xmlns:a16="http://schemas.microsoft.com/office/drawing/2014/main" id="{2B23CFB6-C96F-2738-656C-799A569A57DB}"/>
-              </a:ext>
-            </a:extLst>
-          </p:cNvPr>
-          <p:cNvSpPr>
-            <a:spLocks noGrp="1"/>
-          </p:cNvSpPr>
-          <p:nvPr>
-            <p:ph type="title"/>
-          </p:nvPr>
-        </p:nvSpPr>
-        <p:spPr/>
-        <p:txBody>
-          <a:bodyPr/>
-          <a:lstStyle/>
-          <a:p>
-            <a:endParaRPr lang="fr-FR"/>
-          </a:p>
-        </p:txBody>
-      </p:sp>
-      <p:sp>
-        <p:nvSpPr>
-          <p:cNvPr id="3" name="Espace réservé du contenu 2">
-            <a:extLst>
-              <a:ext uri="{FF2B5EF4-FFF2-40B4-BE49-F238E27FC236}">
-                <a16:creationId xmlns:a16="http://schemas.microsoft.com/office/drawing/2014/main" id="{63A0F49C-2000-CFFA-4CC2-9D86BC1329D8}"/>
-              </a:ext>
-            </a:extLst>
-          </p:cNvPr>
-          <p:cNvSpPr>
-            <a:spLocks noGrp="1"/>
-          </p:cNvSpPr>
-          <p:nvPr>
-            <p:ph idx="1"/>
-          </p:nvPr>
-        </p:nvSpPr>
-        <p:spPr/>
-        <p:txBody>
-          <a:bodyPr/>
-          <a:lstStyle/>
-          <a:p>
-            <a:endParaRPr lang="fr-FR" dirty="0"/>
-          </a:p>
-        </p:txBody>
-      </p:sp>
-    </p:spTree>
-    <p:extLst>
-      <p:ext uri="{BB962C8B-B14F-4D97-AF65-F5344CB8AC3E}">
-        <p14:creationId xmlns:p14="http://schemas.microsoft.com/office/powerpoint/2010/main" val="696684578"/>
-      </p:ext>
-    </p:extLst>
-  </p:cSld>
-  <p:clrMapOvr>
-    <a:masterClrMapping/>
-  </p:clrMapOvr>
-</p:sld>
-</file>
-
-<file path=ppt/slides/slide20.xml><?xml version="1.0" encoding="utf-8"?>
+<file path=ppt/slides/slide21.xml><?xml version="1.0" encoding="utf-8"?>
 <p:sld xmlns:a="http://schemas.openxmlformats.org/drawingml/2006/main" xmlns:r="http://schemas.openxmlformats.org/officeDocument/2006/relationships" xmlns:p="http://schemas.openxmlformats.org/presentationml/2006/main">
   <p:cSld>
     <p:spTree>
@@ -32714,7 +33221,7 @@
 </p:sld>
 </file>
 
-<file path=ppt/slides/slide21.xml><?xml version="1.0" encoding="utf-8"?>
+<file path=ppt/slides/slide22.xml><?xml version="1.0" encoding="utf-8"?>
 <p:sld xmlns:a="http://schemas.openxmlformats.org/drawingml/2006/main" xmlns:r="http://schemas.openxmlformats.org/officeDocument/2006/relationships" xmlns:p="http://schemas.openxmlformats.org/presentationml/2006/main">
   <p:cSld>
     <p:spTree>
@@ -32761,10 +33268,10 @@
       </p:sp>
       <p:sp>
         <p:nvSpPr>
-          <p:cNvPr id="3" name="Espace réservé du contenu 2">
+          <p:cNvPr id="6" name="Espace réservé du contenu 5">
             <a:extLst>
               <a:ext uri="{FF2B5EF4-FFF2-40B4-BE49-F238E27FC236}">
-                <a16:creationId xmlns:a16="http://schemas.microsoft.com/office/drawing/2014/main" id="{EE57C7BD-D03F-35FF-CA8A-060B4E802EF9}"/>
+                <a16:creationId xmlns:a16="http://schemas.microsoft.com/office/drawing/2014/main" id="{158689C8-B04E-768F-DC86-88F37C99A6E8}"/>
               </a:ext>
             </a:extLst>
           </p:cNvPr>
@@ -32780,7 +33287,7 @@
           <a:bodyPr/>
           <a:lstStyle/>
           <a:p>
-            <a:endParaRPr lang="fr-FR" dirty="0"/>
+            <a:endParaRPr lang="fr-FR"/>
           </a:p>
         </p:txBody>
       </p:sp>
@@ -37916,8 +38423,8 @@
           </p:sp>
         </mc:Fallback>
       </mc:AlternateContent>
-      <mc:AlternateContent xmlns:mc="http://schemas.openxmlformats.org/markup-compatibility/2006">
-        <mc:Choice xmlns:a14="http://schemas.microsoft.com/office/drawing/2010/main" Requires="a14">
+      <mc:AlternateContent xmlns:mc="http://schemas.openxmlformats.org/markup-compatibility/2006" xmlns:a14="http://schemas.microsoft.com/office/drawing/2010/main">
+        <mc:Choice Requires="a14">
           <p:sp>
             <p:nvSpPr>
               <p:cNvPr id="3" name="Espace réservé du contenu 2">
@@ -41457,7 +41964,7 @@
             </p:txBody>
           </p:sp>
         </mc:Choice>
-        <mc:Fallback>
+        <mc:Fallback xmlns="">
           <p:sp>
             <p:nvSpPr>
               <p:cNvPr id="3" name="Espace réservé du contenu 2">
@@ -41709,8 +42216,8 @@
           </p:sp>
         </mc:Fallback>
       </mc:AlternateContent>
-      <mc:AlternateContent xmlns:mc="http://schemas.openxmlformats.org/markup-compatibility/2006">
-        <mc:Choice xmlns:a14="http://schemas.microsoft.com/office/drawing/2010/main" Requires="a14">
+      <mc:AlternateContent xmlns:mc="http://schemas.openxmlformats.org/markup-compatibility/2006" xmlns:a14="http://schemas.microsoft.com/office/drawing/2010/main">
+        <mc:Choice Requires="a14">
           <p:sp>
             <p:nvSpPr>
               <p:cNvPr id="3" name="Espace réservé du contenu 2">
@@ -45080,7 +45587,7 @@
             </p:txBody>
           </p:sp>
         </mc:Choice>
-        <mc:Fallback>
+        <mc:Fallback xmlns="">
           <p:sp>
             <p:nvSpPr>
               <p:cNvPr id="3" name="Espace réservé du contenu 2">
